--- a/答辩PPT.pptx
+++ b/答辩PPT.pptx
@@ -5,23 +5,23 @@
     <p:sldMasterId id="2147483648" r:id="rId1"/>
   </p:sldMasterIdLst>
   <p:sldIdLst>
-    <p:sldId id="256" r:id="rId2"/>
-    <p:sldId id="257" r:id="rId3"/>
-    <p:sldId id="258" r:id="rId4"/>
-    <p:sldId id="259" r:id="rId5"/>
-    <p:sldId id="260" r:id="rId6"/>
-    <p:sldId id="261" r:id="rId7"/>
-    <p:sldId id="262" r:id="rId8"/>
-    <p:sldId id="263" r:id="rId9"/>
-    <p:sldId id="264" r:id="rId10"/>
-    <p:sldId id="265" r:id="rId11"/>
-    <p:sldId id="266" r:id="rId12"/>
-    <p:sldId id="267" r:id="rId13"/>
-    <p:sldId id="268" r:id="rId14"/>
-    <p:sldId id="269" r:id="rId15"/>
-    <p:sldId id="270" r:id="rId16"/>
+    <p:sldId id="256" r:id="rId7"/>
+    <p:sldId id="257" r:id="rId8"/>
+    <p:sldId id="258" r:id="rId9"/>
+    <p:sldId id="259" r:id="rId10"/>
+    <p:sldId id="260" r:id="rId11"/>
+    <p:sldId id="261" r:id="rId12"/>
+    <p:sldId id="262" r:id="rId13"/>
+    <p:sldId id="263" r:id="rId14"/>
+    <p:sldId id="264" r:id="rId15"/>
+    <p:sldId id="265" r:id="rId16"/>
+    <p:sldId id="266" r:id="rId17"/>
+    <p:sldId id="267" r:id="rId18"/>
+    <p:sldId id="268" r:id="rId19"/>
+    <p:sldId id="269" r:id="rId20"/>
+    <p:sldId id="270" r:id="rId21"/>
   </p:sldIdLst>
-  <p:sldSz cx="12192000" cy="6858000"/>
+  <p:sldSz cx="12191695" cy="6858000" type="screen4x3"/>
   <p:notesSz cx="6858000" cy="9144000"/>
   <p:defaultTextStyle>
     <a:defPPr>
@@ -118,22 +118,6 @@
       </a:defRPr>
     </a:lvl9pPr>
   </p:defaultTextStyle>
-  <p:extLst>
-    <p:ext uri="{EFAFB233-063F-42B5-8137-9DF3F51BA10A}">
-      <p15:sldGuideLst xmlns:p15="http://schemas.microsoft.com/office/powerpoint/2012/main">
-        <p15:guide id="1" orient="horz" pos="2160">
-          <p15:clr>
-            <a:srgbClr val="A4A3A4"/>
-          </p15:clr>
-        </p15:guide>
-        <p15:guide id="2" pos="2880">
-          <p15:clr>
-            <a:srgbClr val="A4A3A4"/>
-          </p15:clr>
-        </p15:guide>
-      </p15:sldGuideLst>
-    </p:ext>
-  </p:extLst>
 </p:presentation>
 </file>
 
@@ -175,9 +159,10 @@
           <a:lstStyle/>
           <a:p>
             <a:r>
-              <a:rPr lang="en-US"/>
+              <a:rPr lang="en-US" smtClean="0"/>
               <a:t>Click to edit Master title style</a:t>
             </a:r>
+            <a:endParaRPr lang="en-US"/>
           </a:p>
         </p:txBody>
       </p:sp>
@@ -293,9 +278,10 @@
           </a:lstStyle>
           <a:p>
             <a:r>
-              <a:rPr lang="en-US"/>
+              <a:rPr lang="en-US" smtClean="0"/>
               <a:t>Click to edit Master subtitle style</a:t>
             </a:r>
+            <a:endParaRPr lang="en-US"/>
           </a:p>
         </p:txBody>
       </p:sp>
@@ -316,7 +302,7 @@
           <a:p>
             <a:fld id="{5BCAD085-E8A6-8845-BD4E-CB4CCA059FC4}" type="datetimeFigureOut">
               <a:rPr lang="en-US" smtClean="0"/>
-              <a:t>6/26/2026</a:t>
+              <a:t>1/27/13</a:t>
             </a:fld>
             <a:endParaRPr lang="en-US"/>
           </a:p>
@@ -410,9 +396,10 @@
           <a:lstStyle/>
           <a:p>
             <a:r>
-              <a:rPr lang="en-US"/>
+              <a:rPr lang="en-US" smtClean="0"/>
               <a:t>Click to edit Master title style</a:t>
             </a:r>
+            <a:endParaRPr lang="en-US"/>
           </a:p>
         </p:txBody>
       </p:sp>
@@ -433,37 +420,38 @@
           <a:p>
             <a:pPr lvl="0"/>
             <a:r>
-              <a:rPr lang="en-US"/>
+              <a:rPr lang="en-US" smtClean="0"/>
               <a:t>Click to edit Master text styles</a:t>
             </a:r>
           </a:p>
           <a:p>
             <a:pPr lvl="1"/>
             <a:r>
-              <a:rPr lang="en-US"/>
+              <a:rPr lang="en-US" smtClean="0"/>
               <a:t>Second level</a:t>
             </a:r>
           </a:p>
           <a:p>
             <a:pPr lvl="2"/>
             <a:r>
-              <a:rPr lang="en-US"/>
+              <a:rPr lang="en-US" smtClean="0"/>
               <a:t>Third level</a:t>
             </a:r>
           </a:p>
           <a:p>
             <a:pPr lvl="3"/>
             <a:r>
-              <a:rPr lang="en-US"/>
+              <a:rPr lang="en-US" smtClean="0"/>
               <a:t>Fourth level</a:t>
             </a:r>
           </a:p>
           <a:p>
             <a:pPr lvl="4"/>
             <a:r>
-              <a:rPr lang="en-US"/>
+              <a:rPr lang="en-US" smtClean="0"/>
               <a:t>Fifth level</a:t>
             </a:r>
+            <a:endParaRPr lang="en-US"/>
           </a:p>
         </p:txBody>
       </p:sp>
@@ -484,7 +472,7 @@
           <a:p>
             <a:fld id="{5BCAD085-E8A6-8845-BD4E-CB4CCA059FC4}" type="datetimeFigureOut">
               <a:rPr lang="en-US" smtClean="0"/>
-              <a:t>6/26/2026</a:t>
+              <a:t>1/27/13</a:t>
             </a:fld>
             <a:endParaRPr lang="en-US"/>
           </a:p>
@@ -583,9 +571,10 @@
           <a:lstStyle/>
           <a:p>
             <a:r>
-              <a:rPr lang="en-US"/>
+              <a:rPr lang="en-US" smtClean="0"/>
               <a:t>Click to edit Master title style</a:t>
             </a:r>
+            <a:endParaRPr lang="en-US"/>
           </a:p>
         </p:txBody>
       </p:sp>
@@ -611,37 +600,38 @@
           <a:p>
             <a:pPr lvl="0"/>
             <a:r>
-              <a:rPr lang="en-US"/>
+              <a:rPr lang="en-US" smtClean="0"/>
               <a:t>Click to edit Master text styles</a:t>
             </a:r>
           </a:p>
           <a:p>
             <a:pPr lvl="1"/>
             <a:r>
-              <a:rPr lang="en-US"/>
+              <a:rPr lang="en-US" smtClean="0"/>
               <a:t>Second level</a:t>
             </a:r>
           </a:p>
           <a:p>
             <a:pPr lvl="2"/>
             <a:r>
-              <a:rPr lang="en-US"/>
+              <a:rPr lang="en-US" smtClean="0"/>
               <a:t>Third level</a:t>
             </a:r>
           </a:p>
           <a:p>
             <a:pPr lvl="3"/>
             <a:r>
-              <a:rPr lang="en-US"/>
+              <a:rPr lang="en-US" smtClean="0"/>
               <a:t>Fourth level</a:t>
             </a:r>
           </a:p>
           <a:p>
             <a:pPr lvl="4"/>
             <a:r>
-              <a:rPr lang="en-US"/>
+              <a:rPr lang="en-US" smtClean="0"/>
               <a:t>Fifth level</a:t>
             </a:r>
+            <a:endParaRPr lang="en-US"/>
           </a:p>
         </p:txBody>
       </p:sp>
@@ -662,7 +652,7 @@
           <a:p>
             <a:fld id="{5BCAD085-E8A6-8845-BD4E-CB4CCA059FC4}" type="datetimeFigureOut">
               <a:rPr lang="en-US" smtClean="0"/>
-              <a:t>6/26/2026</a:t>
+              <a:t>1/27/13</a:t>
             </a:fld>
             <a:endParaRPr lang="en-US"/>
           </a:p>
@@ -756,9 +746,10 @@
           <a:lstStyle/>
           <a:p>
             <a:r>
-              <a:rPr lang="en-US"/>
+              <a:rPr lang="en-US" smtClean="0"/>
               <a:t>Click to edit Master title style</a:t>
             </a:r>
+            <a:endParaRPr lang="en-US"/>
           </a:p>
         </p:txBody>
       </p:sp>
@@ -779,37 +770,38 @@
           <a:p>
             <a:pPr lvl="0"/>
             <a:r>
-              <a:rPr lang="en-US"/>
+              <a:rPr lang="en-US" smtClean="0"/>
               <a:t>Click to edit Master text styles</a:t>
             </a:r>
           </a:p>
           <a:p>
             <a:pPr lvl="1"/>
             <a:r>
-              <a:rPr lang="en-US"/>
+              <a:rPr lang="en-US" smtClean="0"/>
               <a:t>Second level</a:t>
             </a:r>
           </a:p>
           <a:p>
             <a:pPr lvl="2"/>
             <a:r>
-              <a:rPr lang="en-US"/>
+              <a:rPr lang="en-US" smtClean="0"/>
               <a:t>Third level</a:t>
             </a:r>
           </a:p>
           <a:p>
             <a:pPr lvl="3"/>
             <a:r>
-              <a:rPr lang="en-US"/>
+              <a:rPr lang="en-US" smtClean="0"/>
               <a:t>Fourth level</a:t>
             </a:r>
           </a:p>
           <a:p>
             <a:pPr lvl="4"/>
             <a:r>
-              <a:rPr lang="en-US"/>
+              <a:rPr lang="en-US" smtClean="0"/>
               <a:t>Fifth level</a:t>
             </a:r>
+            <a:endParaRPr lang="en-US"/>
           </a:p>
         </p:txBody>
       </p:sp>
@@ -830,7 +822,7 @@
           <a:p>
             <a:fld id="{5BCAD085-E8A6-8845-BD4E-CB4CCA059FC4}" type="datetimeFigureOut">
               <a:rPr lang="en-US" smtClean="0"/>
-              <a:t>6/26/2026</a:t>
+              <a:t>1/27/13</a:t>
             </a:fld>
             <a:endParaRPr lang="en-US"/>
           </a:p>
@@ -933,9 +925,10 @@
           </a:lstStyle>
           <a:p>
             <a:r>
-              <a:rPr lang="en-US"/>
+              <a:rPr lang="en-US" smtClean="0"/>
               <a:t>Click to edit Master title style</a:t>
             </a:r>
+            <a:endParaRPr lang="en-US"/>
           </a:p>
         </p:txBody>
       </p:sp>
@@ -1052,7 +1045,7 @@
           <a:p>
             <a:pPr lvl="0"/>
             <a:r>
-              <a:rPr lang="en-US"/>
+              <a:rPr lang="en-US" smtClean="0"/>
               <a:t>Click to edit Master text styles</a:t>
             </a:r>
           </a:p>
@@ -1075,7 +1068,7 @@
           <a:p>
             <a:fld id="{5BCAD085-E8A6-8845-BD4E-CB4CCA059FC4}" type="datetimeFigureOut">
               <a:rPr lang="en-US" smtClean="0"/>
-              <a:t>6/26/2026</a:t>
+              <a:t>1/27/13</a:t>
             </a:fld>
             <a:endParaRPr lang="en-US"/>
           </a:p>
@@ -1169,9 +1162,10 @@
           <a:lstStyle/>
           <a:p>
             <a:r>
-              <a:rPr lang="en-US"/>
+              <a:rPr lang="en-US" smtClean="0"/>
               <a:t>Click to edit Master title style</a:t>
             </a:r>
+            <a:endParaRPr lang="en-US"/>
           </a:p>
         </p:txBody>
       </p:sp>
@@ -1225,37 +1219,38 @@
           <a:p>
             <a:pPr lvl="0"/>
             <a:r>
-              <a:rPr lang="en-US"/>
+              <a:rPr lang="en-US" smtClean="0"/>
               <a:t>Click to edit Master text styles</a:t>
             </a:r>
           </a:p>
           <a:p>
             <a:pPr lvl="1"/>
             <a:r>
-              <a:rPr lang="en-US"/>
+              <a:rPr lang="en-US" smtClean="0"/>
               <a:t>Second level</a:t>
             </a:r>
           </a:p>
           <a:p>
             <a:pPr lvl="2"/>
             <a:r>
-              <a:rPr lang="en-US"/>
+              <a:rPr lang="en-US" smtClean="0"/>
               <a:t>Third level</a:t>
             </a:r>
           </a:p>
           <a:p>
             <a:pPr lvl="3"/>
             <a:r>
-              <a:rPr lang="en-US"/>
+              <a:rPr lang="en-US" smtClean="0"/>
               <a:t>Fourth level</a:t>
             </a:r>
           </a:p>
           <a:p>
             <a:pPr lvl="4"/>
             <a:r>
-              <a:rPr lang="en-US"/>
+              <a:rPr lang="en-US" smtClean="0"/>
               <a:t>Fifth level</a:t>
             </a:r>
+            <a:endParaRPr lang="en-US"/>
           </a:p>
         </p:txBody>
       </p:sp>
@@ -1309,37 +1304,38 @@
           <a:p>
             <a:pPr lvl="0"/>
             <a:r>
-              <a:rPr lang="en-US"/>
+              <a:rPr lang="en-US" smtClean="0"/>
               <a:t>Click to edit Master text styles</a:t>
             </a:r>
           </a:p>
           <a:p>
             <a:pPr lvl="1"/>
             <a:r>
-              <a:rPr lang="en-US"/>
+              <a:rPr lang="en-US" smtClean="0"/>
               <a:t>Second level</a:t>
             </a:r>
           </a:p>
           <a:p>
             <a:pPr lvl="2"/>
             <a:r>
-              <a:rPr lang="en-US"/>
+              <a:rPr lang="en-US" smtClean="0"/>
               <a:t>Third level</a:t>
             </a:r>
           </a:p>
           <a:p>
             <a:pPr lvl="3"/>
             <a:r>
-              <a:rPr lang="en-US"/>
+              <a:rPr lang="en-US" smtClean="0"/>
               <a:t>Fourth level</a:t>
             </a:r>
           </a:p>
           <a:p>
             <a:pPr lvl="4"/>
             <a:r>
-              <a:rPr lang="en-US"/>
+              <a:rPr lang="en-US" smtClean="0"/>
               <a:t>Fifth level</a:t>
             </a:r>
+            <a:endParaRPr lang="en-US"/>
           </a:p>
         </p:txBody>
       </p:sp>
@@ -1360,7 +1356,7 @@
           <a:p>
             <a:fld id="{5BCAD085-E8A6-8845-BD4E-CB4CCA059FC4}" type="datetimeFigureOut">
               <a:rPr lang="en-US" smtClean="0"/>
-              <a:t>6/26/2026</a:t>
+              <a:t>1/27/13</a:t>
             </a:fld>
             <a:endParaRPr lang="en-US"/>
           </a:p>
@@ -1458,9 +1454,10 @@
           </a:lstStyle>
           <a:p>
             <a:r>
-              <a:rPr lang="en-US"/>
+              <a:rPr lang="en-US" smtClean="0"/>
               <a:t>Click to edit Master title style</a:t>
             </a:r>
+            <a:endParaRPr lang="en-US"/>
           </a:p>
         </p:txBody>
       </p:sp>
@@ -1523,7 +1520,7 @@
           <a:p>
             <a:pPr lvl="0"/>
             <a:r>
-              <a:rPr lang="en-US"/>
+              <a:rPr lang="en-US" smtClean="0"/>
               <a:t>Click to edit Master text styles</a:t>
             </a:r>
           </a:p>
@@ -1579,37 +1576,38 @@
           <a:p>
             <a:pPr lvl="0"/>
             <a:r>
-              <a:rPr lang="en-US"/>
+              <a:rPr lang="en-US" smtClean="0"/>
               <a:t>Click to edit Master text styles</a:t>
             </a:r>
           </a:p>
           <a:p>
             <a:pPr lvl="1"/>
             <a:r>
-              <a:rPr lang="en-US"/>
+              <a:rPr lang="en-US" smtClean="0"/>
               <a:t>Second level</a:t>
             </a:r>
           </a:p>
           <a:p>
             <a:pPr lvl="2"/>
             <a:r>
-              <a:rPr lang="en-US"/>
+              <a:rPr lang="en-US" smtClean="0"/>
               <a:t>Third level</a:t>
             </a:r>
           </a:p>
           <a:p>
             <a:pPr lvl="3"/>
             <a:r>
-              <a:rPr lang="en-US"/>
+              <a:rPr lang="en-US" smtClean="0"/>
               <a:t>Fourth level</a:t>
             </a:r>
           </a:p>
           <a:p>
             <a:pPr lvl="4"/>
             <a:r>
-              <a:rPr lang="en-US"/>
+              <a:rPr lang="en-US" smtClean="0"/>
               <a:t>Fifth level</a:t>
             </a:r>
+            <a:endParaRPr lang="en-US"/>
           </a:p>
         </p:txBody>
       </p:sp>
@@ -1672,7 +1670,7 @@
           <a:p>
             <a:pPr lvl="0"/>
             <a:r>
-              <a:rPr lang="en-US"/>
+              <a:rPr lang="en-US" smtClean="0"/>
               <a:t>Click to edit Master text styles</a:t>
             </a:r>
           </a:p>
@@ -1728,37 +1726,38 @@
           <a:p>
             <a:pPr lvl="0"/>
             <a:r>
-              <a:rPr lang="en-US"/>
+              <a:rPr lang="en-US" smtClean="0"/>
               <a:t>Click to edit Master text styles</a:t>
             </a:r>
           </a:p>
           <a:p>
             <a:pPr lvl="1"/>
             <a:r>
-              <a:rPr lang="en-US"/>
+              <a:rPr lang="en-US" smtClean="0"/>
               <a:t>Second level</a:t>
             </a:r>
           </a:p>
           <a:p>
             <a:pPr lvl="2"/>
             <a:r>
-              <a:rPr lang="en-US"/>
+              <a:rPr lang="en-US" smtClean="0"/>
               <a:t>Third level</a:t>
             </a:r>
           </a:p>
           <a:p>
             <a:pPr lvl="3"/>
             <a:r>
-              <a:rPr lang="en-US"/>
+              <a:rPr lang="en-US" smtClean="0"/>
               <a:t>Fourth level</a:t>
             </a:r>
           </a:p>
           <a:p>
             <a:pPr lvl="4"/>
             <a:r>
-              <a:rPr lang="en-US"/>
+              <a:rPr lang="en-US" smtClean="0"/>
               <a:t>Fifth level</a:t>
             </a:r>
+            <a:endParaRPr lang="en-US"/>
           </a:p>
         </p:txBody>
       </p:sp>
@@ -1779,7 +1778,7 @@
           <a:p>
             <a:fld id="{5BCAD085-E8A6-8845-BD4E-CB4CCA059FC4}" type="datetimeFigureOut">
               <a:rPr lang="en-US" smtClean="0"/>
-              <a:t>6/26/2026</a:t>
+              <a:t>1/27/13</a:t>
             </a:fld>
             <a:endParaRPr lang="en-US"/>
           </a:p>
@@ -1873,9 +1872,10 @@
           <a:lstStyle/>
           <a:p>
             <a:r>
-              <a:rPr lang="en-US"/>
+              <a:rPr lang="en-US" smtClean="0"/>
               <a:t>Click to edit Master title style</a:t>
             </a:r>
+            <a:endParaRPr lang="en-US"/>
           </a:p>
         </p:txBody>
       </p:sp>
@@ -1896,7 +1896,7 @@
           <a:p>
             <a:fld id="{5BCAD085-E8A6-8845-BD4E-CB4CCA059FC4}" type="datetimeFigureOut">
               <a:rPr lang="en-US" smtClean="0"/>
-              <a:t>6/26/2026</a:t>
+              <a:t>1/27/13</a:t>
             </a:fld>
             <a:endParaRPr lang="en-US"/>
           </a:p>
@@ -1991,7 +1991,7 @@
           <a:p>
             <a:fld id="{5BCAD085-E8A6-8845-BD4E-CB4CCA059FC4}" type="datetimeFigureOut">
               <a:rPr lang="en-US" smtClean="0"/>
-              <a:t>6/26/2026</a:t>
+              <a:t>1/27/13</a:t>
             </a:fld>
             <a:endParaRPr lang="en-US"/>
           </a:p>
@@ -2094,9 +2094,10 @@
           </a:lstStyle>
           <a:p>
             <a:r>
-              <a:rPr lang="en-US"/>
+              <a:rPr lang="en-US" smtClean="0"/>
               <a:t>Click to edit Master title style</a:t>
             </a:r>
+            <a:endParaRPr lang="en-US"/>
           </a:p>
         </p:txBody>
       </p:sp>
@@ -2150,37 +2151,38 @@
           <a:p>
             <a:pPr lvl="0"/>
             <a:r>
-              <a:rPr lang="en-US"/>
+              <a:rPr lang="en-US" smtClean="0"/>
               <a:t>Click to edit Master text styles</a:t>
             </a:r>
           </a:p>
           <a:p>
             <a:pPr lvl="1"/>
             <a:r>
-              <a:rPr lang="en-US"/>
+              <a:rPr lang="en-US" smtClean="0"/>
               <a:t>Second level</a:t>
             </a:r>
           </a:p>
           <a:p>
             <a:pPr lvl="2"/>
             <a:r>
-              <a:rPr lang="en-US"/>
+              <a:rPr lang="en-US" smtClean="0"/>
               <a:t>Third level</a:t>
             </a:r>
           </a:p>
           <a:p>
             <a:pPr lvl="3"/>
             <a:r>
-              <a:rPr lang="en-US"/>
+              <a:rPr lang="en-US" smtClean="0"/>
               <a:t>Fourth level</a:t>
             </a:r>
           </a:p>
           <a:p>
             <a:pPr lvl="4"/>
             <a:r>
-              <a:rPr lang="en-US"/>
+              <a:rPr lang="en-US" smtClean="0"/>
               <a:t>Fifth level</a:t>
             </a:r>
+            <a:endParaRPr lang="en-US"/>
           </a:p>
         </p:txBody>
       </p:sp>
@@ -2243,7 +2245,7 @@
           <a:p>
             <a:pPr lvl="0"/>
             <a:r>
-              <a:rPr lang="en-US"/>
+              <a:rPr lang="en-US" smtClean="0"/>
               <a:t>Click to edit Master text styles</a:t>
             </a:r>
           </a:p>
@@ -2266,7 +2268,7 @@
           <a:p>
             <a:fld id="{5BCAD085-E8A6-8845-BD4E-CB4CCA059FC4}" type="datetimeFigureOut">
               <a:rPr lang="en-US" smtClean="0"/>
-              <a:t>6/26/2026</a:t>
+              <a:t>1/27/13</a:t>
             </a:fld>
             <a:endParaRPr lang="en-US"/>
           </a:p>
@@ -2369,9 +2371,10 @@
           </a:lstStyle>
           <a:p>
             <a:r>
-              <a:rPr lang="en-US"/>
+              <a:rPr lang="en-US" smtClean="0"/>
               <a:t>Click to edit Master title style</a:t>
             </a:r>
+            <a:endParaRPr lang="en-US"/>
           </a:p>
         </p:txBody>
       </p:sp>
@@ -2495,7 +2498,7 @@
           <a:p>
             <a:pPr lvl="0"/>
             <a:r>
-              <a:rPr lang="en-US"/>
+              <a:rPr lang="en-US" smtClean="0"/>
               <a:t>Click to edit Master text styles</a:t>
             </a:r>
           </a:p>
@@ -2518,7 +2521,7 @@
           <a:p>
             <a:fld id="{5BCAD085-E8A6-8845-BD4E-CB4CCA059FC4}" type="datetimeFigureOut">
               <a:rPr lang="en-US" smtClean="0"/>
-              <a:t>6/26/2026</a:t>
+              <a:t>1/27/13</a:t>
             </a:fld>
             <a:endParaRPr lang="en-US"/>
           </a:p>
@@ -2627,9 +2630,10 @@
           <a:lstStyle/>
           <a:p>
             <a:r>
-              <a:rPr lang="en-US"/>
+              <a:rPr lang="en-US" smtClean="0"/>
               <a:t>Click to edit Master title style</a:t>
             </a:r>
+            <a:endParaRPr lang="en-US"/>
           </a:p>
         </p:txBody>
       </p:sp>
@@ -2660,37 +2664,38 @@
           <a:p>
             <a:pPr lvl="0"/>
             <a:r>
-              <a:rPr lang="en-US"/>
+              <a:rPr lang="en-US" smtClean="0"/>
               <a:t>Click to edit Master text styles</a:t>
             </a:r>
           </a:p>
           <a:p>
             <a:pPr lvl="1"/>
             <a:r>
-              <a:rPr lang="en-US"/>
+              <a:rPr lang="en-US" smtClean="0"/>
               <a:t>Second level</a:t>
             </a:r>
           </a:p>
           <a:p>
             <a:pPr lvl="2"/>
             <a:r>
-              <a:rPr lang="en-US"/>
+              <a:rPr lang="en-US" smtClean="0"/>
               <a:t>Third level</a:t>
             </a:r>
           </a:p>
           <a:p>
             <a:pPr lvl="3"/>
             <a:r>
-              <a:rPr lang="en-US"/>
+              <a:rPr lang="en-US" smtClean="0"/>
               <a:t>Fourth level</a:t>
             </a:r>
           </a:p>
           <a:p>
             <a:pPr lvl="4"/>
             <a:r>
-              <a:rPr lang="en-US"/>
+              <a:rPr lang="en-US" smtClean="0"/>
               <a:t>Fifth level</a:t>
             </a:r>
+            <a:endParaRPr lang="en-US"/>
           </a:p>
         </p:txBody>
       </p:sp>
@@ -2729,7 +2734,7 @@
           <a:p>
             <a:fld id="{5BCAD085-E8A6-8845-BD4E-CB4CCA059FC4}" type="datetimeFigureOut">
               <a:rPr lang="en-US" smtClean="0"/>
-              <a:t>6/26/2026</a:t>
+              <a:t>1/27/13</a:t>
             </a:fld>
             <a:endParaRPr lang="en-US"/>
           </a:p>
@@ -3088,7 +3093,7 @@
 </file>
 
 <file path=ppt/slides/slide1.xml><?xml version="1.0" encoding="utf-8"?>
-<p:sld xmlns:a="http://schemas.openxmlformats.org/drawingml/2006/main" xmlns:r="http://schemas.openxmlformats.org/officeDocument/2006/relationships" xmlns:p="http://schemas.openxmlformats.org/presentationml/2006/main">
+<p:sld xmlns:a="http://schemas.openxmlformats.org/drawingml/2006/main" xmlns:p="http://schemas.openxmlformats.org/presentationml/2006/main" xmlns:r="http://schemas.openxmlformats.org/officeDocument/2006/relationships">
   <p:cSld>
     <p:bg>
       <p:bgPr>
@@ -3104,14 +3109,7 @@
         <p:cNvGrpSpPr/>
         <p:nvPr/>
       </p:nvGrpSpPr>
-      <p:grpSpPr>
-        <a:xfrm>
-          <a:off x="0" y="0"/>
-          <a:ext cx="0" cy="0"/>
-          <a:chOff x="0" y="0"/>
-          <a:chExt cx="0" cy="0"/>
-        </a:xfrm>
-      </p:grpSpPr>
+      <p:grpSpPr/>
       <p:sp>
         <p:nvSpPr>
           <p:cNvPr id="2" name="Rectangle 1"/>
@@ -3152,7 +3150,6 @@
           <a:lstStyle/>
           <a:p>
             <a:pPr algn="ctr"/>
-            <a:endParaRPr/>
           </a:p>
         </p:txBody>
       </p:sp>
@@ -3230,14 +3227,14 @@
       </p:sp>
       <p:sp>
         <p:nvSpPr>
-          <p:cNvPr id="6" name="TextBox 5"/>
+          <p:cNvPr id="5" name="TextBox 4"/>
           <p:cNvSpPr txBox="1"/>
           <p:nvPr/>
         </p:nvSpPr>
         <p:spPr>
           <a:xfrm>
-            <a:off x="1080000" y="5040000"/>
-            <a:ext cx="9720000" cy="830997"/>
+            <a:off x="1080000" y="3240000"/>
+            <a:ext cx="9720000" cy="540000"/>
           </a:xfrm>
           <a:prstGeom prst="rect">
             <a:avLst/>
@@ -3251,6 +3248,42 @@
           <a:lstStyle/>
           <a:p>
             <a:pPr algn="l">
+              <a:defRPr sz="1800" b="0">
+                <a:solidFill>
+                  <a:srgbClr val="566573"/>
+                </a:solidFill>
+                <a:latin typeface="Microsoft YaHei"/>
+              </a:defRPr>
+            </a:pPr>
+            <a:r>
+              <a:t>《数据分析与数据挖掘》课程项目答辩 — 项目6</a:t>
+            </a:r>
+          </a:p>
+        </p:txBody>
+      </p:sp>
+      <p:sp>
+        <p:nvSpPr>
+          <p:cNvPr id="6" name="TextBox 5"/>
+          <p:cNvSpPr txBox="1"/>
+          <p:nvPr/>
+        </p:nvSpPr>
+        <p:spPr>
+          <a:xfrm>
+            <a:off x="1080000" y="5040000"/>
+            <a:ext cx="9720000" cy="1080000"/>
+          </a:xfrm>
+          <a:prstGeom prst="rect">
+            <a:avLst/>
+          </a:prstGeom>
+          <a:noFill/>
+        </p:spPr>
+        <p:txBody>
+          <a:bodyPr wrap="square">
+            <a:spAutoFit/>
+          </a:bodyPr>
+          <a:lstStyle/>
+          <a:p>
+            <a:pPr algn="l">
               <a:defRPr sz="1600" b="0">
                 <a:solidFill>
                   <a:srgbClr val="566573"/>
@@ -3259,72 +3292,16 @@
               </a:defRPr>
             </a:pPr>
             <a:r>
-              <a:rPr dirty="0" err="1"/>
-              <a:t>小组成员</a:t>
-            </a:r>
-            <a:r>
-              <a:rPr dirty="0"/>
-              <a:t>：</a:t>
-            </a:r>
-            <a:r>
-              <a:rPr lang="zh-CN" altLang="en-US" dirty="0"/>
-              <a:t>张嘉鹏</a:t>
-            </a:r>
-            <a:r>
-              <a:rPr dirty="0"/>
-              <a:t>  |  </a:t>
-            </a:r>
-            <a:r>
-              <a:rPr lang="zh-CN" altLang="en-US" dirty="0"/>
-              <a:t>陈国俊</a:t>
-            </a:r>
-            <a:r>
-              <a:rPr dirty="0"/>
-              <a:t>  |  </a:t>
-            </a:r>
-            <a:r>
-              <a:rPr lang="zh-CN" altLang="en-US" dirty="0"/>
-              <a:t>郑圣豪</a:t>
-            </a:r>
-            <a:br>
-              <a:rPr dirty="0"/>
-            </a:br>
-            <a:r>
-              <a:rPr dirty="0"/>
-              <a:t>专业班级：</a:t>
-            </a:r>
-            <a:r>
-              <a:rPr lang="en-US" dirty="0"/>
-              <a:t>24</a:t>
-            </a:r>
-            <a:r>
-              <a:rPr lang="zh-CN" altLang="en-US" dirty="0"/>
-              <a:t>计算机科学与技术</a:t>
-            </a:r>
-            <a:r>
-              <a:rPr lang="en-US" altLang="zh-CN" dirty="0"/>
-              <a:t>2</a:t>
-            </a:r>
-            <a:r>
-              <a:rPr lang="zh-CN" altLang="en-US" dirty="0"/>
-              <a:t>班</a:t>
-            </a:r>
-            <a:br>
-              <a:rPr dirty="0"/>
-            </a:br>
-            <a:r>
-              <a:rPr dirty="0" err="1"/>
-              <a:t>指导老师</a:t>
-            </a:r>
-            <a:r>
-              <a:rPr dirty="0"/>
-              <a:t>：</a:t>
-            </a:r>
-            <a:r>
-              <a:rPr lang="zh-CN" altLang="en-US" dirty="0"/>
-              <a:t>蓝连涛</a:t>
-            </a:r>
-            <a:endParaRPr dirty="0"/>
+              <a:t>小组成员：XXX  |  XXX  |  XXX</a:t>
+            </a:r>
+            <a:br/>
+            <a:r>
+              <a:t>专业班级：XXX</a:t>
+            </a:r>
+            <a:br/>
+            <a:r>
+              <a:t>指导老师：XXX</a:t>
+            </a:r>
           </a:p>
         </p:txBody>
       </p:sp>
@@ -3337,7 +3314,7 @@
 </file>
 
 <file path=ppt/slides/slide10.xml><?xml version="1.0" encoding="utf-8"?>
-<p:sld xmlns:a="http://schemas.openxmlformats.org/drawingml/2006/main" xmlns:r="http://schemas.openxmlformats.org/officeDocument/2006/relationships" xmlns:p="http://schemas.openxmlformats.org/presentationml/2006/main">
+<p:sld xmlns:a="http://schemas.openxmlformats.org/drawingml/2006/main" xmlns:p="http://schemas.openxmlformats.org/presentationml/2006/main" xmlns:r="http://schemas.openxmlformats.org/officeDocument/2006/relationships">
   <p:cSld>
     <p:bg>
       <p:bgPr>
@@ -3353,14 +3330,7 @@
         <p:cNvGrpSpPr/>
         <p:nvPr/>
       </p:nvGrpSpPr>
-      <p:grpSpPr>
-        <a:xfrm>
-          <a:off x="0" y="0"/>
-          <a:ext cx="0" cy="0"/>
-          <a:chOff x="0" y="0"/>
-          <a:chExt cx="0" cy="0"/>
-        </a:xfrm>
-      </p:grpSpPr>
+      <p:grpSpPr/>
       <p:sp>
         <p:nvSpPr>
           <p:cNvPr id="2" name="Rectangle 1"/>
@@ -3397,7 +3367,7 @@
           </a:fontRef>
         </p:style>
         <p:txBody>
-          <a:bodyPr wrap="square" lIns="540000" tIns="180000" rtlCol="0" anchor="ctr"/>
+          <a:bodyPr rtlCol="0" anchor="ctr" wrap="square" lIns="540000" tIns="180000"/>
           <a:lstStyle/>
           <a:p>
             <a:pPr algn="l">
@@ -3460,7 +3430,7 @@
         </p:nvGraphicFramePr>
         <p:xfrm>
           <a:off x="360000" y="1260000"/>
-          <a:ext cx="10800000" cy="2332320"/>
+          <a:ext cx="10800000" cy="2160000"/>
         </p:xfrm>
         <a:graphic>
           <a:graphicData uri="http://schemas.openxmlformats.org/drawingml/2006/table">
@@ -3469,55 +3439,13 @@
                 <a:tableStyleId>{5C22544A-7EE6-4342-B048-85BDC9FD1C3A}</a:tableStyleId>
               </a:tblPr>
               <a:tblGrid>
-                <a:gridCol w="1542857">
-                  <a:extLst>
-                    <a:ext uri="{9D8B030D-6E8A-4147-A177-3AD203B41FA5}">
-                      <a16:colId xmlns:a16="http://schemas.microsoft.com/office/drawing/2014/main" val="20000"/>
-                    </a:ext>
-                  </a:extLst>
-                </a:gridCol>
-                <a:gridCol w="1542857">
-                  <a:extLst>
-                    <a:ext uri="{9D8B030D-6E8A-4147-A177-3AD203B41FA5}">
-                      <a16:colId xmlns:a16="http://schemas.microsoft.com/office/drawing/2014/main" val="20001"/>
-                    </a:ext>
-                  </a:extLst>
-                </a:gridCol>
-                <a:gridCol w="1542857">
-                  <a:extLst>
-                    <a:ext uri="{9D8B030D-6E8A-4147-A177-3AD203B41FA5}">
-                      <a16:colId xmlns:a16="http://schemas.microsoft.com/office/drawing/2014/main" val="20002"/>
-                    </a:ext>
-                  </a:extLst>
-                </a:gridCol>
-                <a:gridCol w="1542857">
-                  <a:extLst>
-                    <a:ext uri="{9D8B030D-6E8A-4147-A177-3AD203B41FA5}">
-                      <a16:colId xmlns:a16="http://schemas.microsoft.com/office/drawing/2014/main" val="20003"/>
-                    </a:ext>
-                  </a:extLst>
-                </a:gridCol>
-                <a:gridCol w="1542857">
-                  <a:extLst>
-                    <a:ext uri="{9D8B030D-6E8A-4147-A177-3AD203B41FA5}">
-                      <a16:colId xmlns:a16="http://schemas.microsoft.com/office/drawing/2014/main" val="20004"/>
-                    </a:ext>
-                  </a:extLst>
-                </a:gridCol>
-                <a:gridCol w="1542857">
-                  <a:extLst>
-                    <a:ext uri="{9D8B030D-6E8A-4147-A177-3AD203B41FA5}">
-                      <a16:colId xmlns:a16="http://schemas.microsoft.com/office/drawing/2014/main" val="20005"/>
-                    </a:ext>
-                  </a:extLst>
-                </a:gridCol>
-                <a:gridCol w="1542858">
-                  <a:extLst>
-                    <a:ext uri="{9D8B030D-6E8A-4147-A177-3AD203B41FA5}">
-                      <a16:colId xmlns:a16="http://schemas.microsoft.com/office/drawing/2014/main" val="20006"/>
-                    </a:ext>
-                  </a:extLst>
-                </a:gridCol>
+                <a:gridCol w="1542857"/>
+                <a:gridCol w="1542857"/>
+                <a:gridCol w="1542857"/>
+                <a:gridCol w="1542857"/>
+                <a:gridCol w="1542857"/>
+                <a:gridCol w="1542857"/>
+                <a:gridCol w="1542858"/>
               </a:tblGrid>
               <a:tr h="432000">
                 <a:tc>
@@ -3688,11 +3616,6 @@
                     </a:solidFill>
                   </a:tcPr>
                 </a:tc>
-                <a:extLst>
-                  <a:ext uri="{0D108BD9-81ED-4DB2-BD59-A6C34878D82A}">
-                    <a16:rowId xmlns:a16="http://schemas.microsoft.com/office/drawing/2014/main" val="10000"/>
-                  </a:ext>
-                </a:extLst>
               </a:tr>
               <a:tr h="432000">
                 <a:tc>
@@ -3733,7 +3656,7 @@
                         </a:defRPr>
                       </a:pPr>
                       <a:r>
-                        <a:t>0.7594</a:t>
+                        <a:t>0.7622</a:t>
                       </a:r>
                     </a:p>
                   </a:txBody>
@@ -3757,7 +3680,7 @@
                         </a:defRPr>
                       </a:pPr>
                       <a:r>
-                        <a:t>0.5362</a:t>
+                        <a:t>0.5404</a:t>
                       </a:r>
                     </a:p>
                   </a:txBody>
@@ -3781,7 +3704,7 @@
                         </a:defRPr>
                       </a:pPr>
                       <a:r>
-                        <a:t>0.6925</a:t>
+                        <a:t>0.6979</a:t>
                       </a:r>
                     </a:p>
                   </a:txBody>
@@ -3805,7 +3728,7 @@
                         </a:defRPr>
                       </a:pPr>
                       <a:r>
-                        <a:t>0.6044</a:t>
+                        <a:t>0.6091</a:t>
                       </a:r>
                     </a:p>
                   </a:txBody>
@@ -3829,7 +3752,7 @@
                         </a:defRPr>
                       </a:pPr>
                       <a:r>
-                        <a:t>0.8359</a:t>
+                        <a:t>0.8364</a:t>
                       </a:r>
                     </a:p>
                   </a:txBody>
@@ -3853,7 +3776,7 @@
                         </a:defRPr>
                       </a:pPr>
                       <a:r>
-                        <a:t>0.6587</a:t>
+                        <a:t>0.6582</a:t>
                       </a:r>
                     </a:p>
                   </a:txBody>
@@ -3863,11 +3786,6 @@
                     </a:solidFill>
                   </a:tcPr>
                 </a:tc>
-                <a:extLst>
-                  <a:ext uri="{0D108BD9-81ED-4DB2-BD59-A6C34878D82A}">
-                    <a16:rowId xmlns:a16="http://schemas.microsoft.com/office/drawing/2014/main" val="10001"/>
-                  </a:ext>
-                </a:extLst>
               </a:tr>
               <a:tr h="432000">
                 <a:tc>
@@ -3904,7 +3822,7 @@
                         </a:defRPr>
                       </a:pPr>
                       <a:r>
-                        <a:t>0.7821</a:t>
+                        <a:t>0.7786</a:t>
                       </a:r>
                     </a:p>
                   </a:txBody>
@@ -3924,7 +3842,7 @@
                         </a:defRPr>
                       </a:pPr>
                       <a:r>
-                        <a:t>0.5717</a:t>
+                        <a:t>0.5662</a:t>
                       </a:r>
                     </a:p>
                   </a:txBody>
@@ -3944,7 +3862,7 @@
                         </a:defRPr>
                       </a:pPr>
                       <a:r>
-                        <a:t>0.7139</a:t>
+                        <a:t>0.7086</a:t>
                       </a:r>
                     </a:p>
                   </a:txBody>
@@ -3964,7 +3882,7 @@
                         </a:defRPr>
                       </a:pPr>
                       <a:r>
-                        <a:t>0.6350</a:t>
+                        <a:t>0.6295</a:t>
                       </a:r>
                     </a:p>
                   </a:txBody>
@@ -3984,7 +3902,7 @@
                         </a:defRPr>
                       </a:pPr>
                       <a:r>
-                        <a:t>0.8382</a:t>
+                        <a:t>0.8386</a:t>
                       </a:r>
                     </a:p>
                   </a:txBody>
@@ -4004,17 +3922,12 @@
                         </a:defRPr>
                       </a:pPr>
                       <a:r>
-                        <a:t>0.6527</a:t>
+                        <a:t>0.6509</a:t>
                       </a:r>
                     </a:p>
                   </a:txBody>
                   <a:tcPr/>
                 </a:tc>
-                <a:extLst>
-                  <a:ext uri="{0D108BD9-81ED-4DB2-BD59-A6C34878D82A}">
-                    <a16:rowId xmlns:a16="http://schemas.microsoft.com/office/drawing/2014/main" val="10002"/>
-                  </a:ext>
-                </a:extLst>
               </a:tr>
               <a:tr h="432000">
                 <a:tc>
@@ -4055,7 +3968,7 @@
                         </a:defRPr>
                       </a:pPr>
                       <a:r>
-                        <a:t>0.7779</a:t>
+                        <a:t>0.7814</a:t>
                       </a:r>
                     </a:p>
                   </a:txBody>
@@ -4079,7 +3992,7 @@
                         </a:defRPr>
                       </a:pPr>
                       <a:r>
-                        <a:t>0.5788</a:t>
+                        <a:t>0.5878</a:t>
                       </a:r>
                     </a:p>
                   </a:txBody>
@@ -4103,7 +4016,7 @@
                         </a:defRPr>
                       </a:pPr>
                       <a:r>
-                        <a:t>0.5989</a:t>
+                        <a:t>0.5909</a:t>
                       </a:r>
                     </a:p>
                   </a:txBody>
@@ -4127,7 +4040,7 @@
                         </a:defRPr>
                       </a:pPr>
                       <a:r>
-                        <a:t>0.5887</a:t>
+                        <a:t>0.5893</a:t>
                       </a:r>
                     </a:p>
                   </a:txBody>
@@ -4151,7 +4064,7 @@
                         </a:defRPr>
                       </a:pPr>
                       <a:r>
-                        <a:t>0.8220</a:t>
+                        <a:t>0.8245</a:t>
                       </a:r>
                     </a:p>
                   </a:txBody>
@@ -4175,7 +4088,7 @@
                         </a:defRPr>
                       </a:pPr>
                       <a:r>
-                        <a:t>0.6313</a:t>
+                        <a:t>0.6353</a:t>
                       </a:r>
                     </a:p>
                   </a:txBody>
@@ -4185,11 +4098,6 @@
                     </a:solidFill>
                   </a:tcPr>
                 </a:tc>
-                <a:extLst>
-                  <a:ext uri="{0D108BD9-81ED-4DB2-BD59-A6C34878D82A}">
-                    <a16:rowId xmlns:a16="http://schemas.microsoft.com/office/drawing/2014/main" val="10003"/>
-                  </a:ext>
-                </a:extLst>
               </a:tr>
               <a:tr h="432000">
                 <a:tc>
@@ -4226,7 +4134,7 @@
                         </a:defRPr>
                       </a:pPr>
                       <a:r>
-                        <a:t>0.7764</a:t>
+                        <a:t>0.7743</a:t>
                       </a:r>
                     </a:p>
                   </a:txBody>
@@ -4246,7 +4154,7 @@
                         </a:defRPr>
                       </a:pPr>
                       <a:r>
-                        <a:t>0.5774</a:t>
+                        <a:t>0.5737</a:t>
                       </a:r>
                     </a:p>
                   </a:txBody>
@@ -4266,7 +4174,7 @@
                         </a:defRPr>
                       </a:pPr>
                       <a:r>
-                        <a:t>0.5882</a:t>
+                        <a:t>0.5829</a:t>
                       </a:r>
                     </a:p>
                   </a:txBody>
@@ -4286,7 +4194,7 @@
                         </a:defRPr>
                       </a:pPr>
                       <a:r>
-                        <a:t>0.5828</a:t>
+                        <a:t>0.5782</a:t>
                       </a:r>
                     </a:p>
                   </a:txBody>
@@ -4306,7 +4214,7 @@
                         </a:defRPr>
                       </a:pPr>
                       <a:r>
-                        <a:t>0.8220</a:t>
+                        <a:t>0.8217</a:t>
                       </a:r>
                     </a:p>
                   </a:txBody>
@@ -4326,17 +4234,12 @@
                         </a:defRPr>
                       </a:pPr>
                       <a:r>
-                        <a:t>0.6353</a:t>
+                        <a:t>0.6273</a:t>
                       </a:r>
                     </a:p>
                   </a:txBody>
                   <a:tcPr/>
                 </a:tc>
-                <a:extLst>
-                  <a:ext uri="{0D108BD9-81ED-4DB2-BD59-A6C34878D82A}">
-                    <a16:rowId xmlns:a16="http://schemas.microsoft.com/office/drawing/2014/main" val="10004"/>
-                  </a:ext>
-                </a:extLst>
               </a:tr>
             </a:tbl>
           </a:graphicData>
@@ -4412,7 +4315,7 @@
               </a:defRPr>
             </a:pPr>
             <a:r>
-              <a:t>✅ 最优模型：随机森林 — ROC-AUC=0.8382，Recall=0.7139（能识别71.4%的流失客户）</a:t>
+              <a:t>✅ 最优模型：随机森林 — ROC-AUC=0.8386，Recall=0.7086（能识别70.9%的流失客户）</a:t>
             </a:r>
           </a:p>
           <a:p>
@@ -4428,7 +4331,7 @@
               </a:defRPr>
             </a:pPr>
             <a:r>
-              <a:t>✅ XGBoost/LightGBM在平衡训练集上过拟合，真实数据上泛化略逊于随机森林</a:t>
+              <a:t>✅ XGBoost/LightGBM准确率略高，但召回率明显低于随机森林</a:t>
             </a:r>
           </a:p>
           <a:p>
@@ -4444,7 +4347,7 @@
               </a:defRPr>
             </a:pPr>
             <a:r>
-              <a:t>✅ 逻辑回归在RFM+WOE加持下召回率达0.6925，且模型最简单</a:t>
+              <a:t>✅ 逻辑回归在RFM+WOE加持下召回率达0.6979，且模型最简单</a:t>
             </a:r>
           </a:p>
           <a:p>
@@ -4474,7 +4377,7 @@
 </file>
 
 <file path=ppt/slides/slide11.xml><?xml version="1.0" encoding="utf-8"?>
-<p:sld xmlns:a="http://schemas.openxmlformats.org/drawingml/2006/main" xmlns:r="http://schemas.openxmlformats.org/officeDocument/2006/relationships" xmlns:p="http://schemas.openxmlformats.org/presentationml/2006/main">
+<p:sld xmlns:a="http://schemas.openxmlformats.org/drawingml/2006/main" xmlns:p="http://schemas.openxmlformats.org/presentationml/2006/main" xmlns:r="http://schemas.openxmlformats.org/officeDocument/2006/relationships">
   <p:cSld>
     <p:bg>
       <p:bgPr>
@@ -4490,14 +4393,7 @@
         <p:cNvGrpSpPr/>
         <p:nvPr/>
       </p:nvGrpSpPr>
-      <p:grpSpPr>
-        <a:xfrm>
-          <a:off x="0" y="0"/>
-          <a:ext cx="0" cy="0"/>
-          <a:chOff x="0" y="0"/>
-          <a:chExt cx="0" cy="0"/>
-        </a:xfrm>
-      </p:grpSpPr>
+      <p:grpSpPr/>
       <p:sp>
         <p:nvSpPr>
           <p:cNvPr id="2" name="Rectangle 1"/>
@@ -4534,7 +4430,7 @@
           </a:fontRef>
         </p:style>
         <p:txBody>
-          <a:bodyPr wrap="square" lIns="540000" tIns="180000" rtlCol="0" anchor="ctr"/>
+          <a:bodyPr rtlCol="0" anchor="ctr" wrap="square" lIns="540000" tIns="180000"/>
           <a:lstStyle/>
           <a:p>
             <a:pPr algn="l">
@@ -4668,7 +4564,7 @@
 </file>
 
 <file path=ppt/slides/slide12.xml><?xml version="1.0" encoding="utf-8"?>
-<p:sld xmlns:a="http://schemas.openxmlformats.org/drawingml/2006/main" xmlns:r="http://schemas.openxmlformats.org/officeDocument/2006/relationships" xmlns:p="http://schemas.openxmlformats.org/presentationml/2006/main">
+<p:sld xmlns:a="http://schemas.openxmlformats.org/drawingml/2006/main" xmlns:p="http://schemas.openxmlformats.org/presentationml/2006/main" xmlns:r="http://schemas.openxmlformats.org/officeDocument/2006/relationships">
   <p:cSld>
     <p:bg>
       <p:bgPr>
@@ -4684,14 +4580,7 @@
         <p:cNvGrpSpPr/>
         <p:nvPr/>
       </p:nvGrpSpPr>
-      <p:grpSpPr>
-        <a:xfrm>
-          <a:off x="0" y="0"/>
-          <a:ext cx="0" cy="0"/>
-          <a:chOff x="0" y="0"/>
-          <a:chExt cx="0" cy="0"/>
-        </a:xfrm>
-      </p:grpSpPr>
+      <p:grpSpPr/>
       <p:sp>
         <p:nvSpPr>
           <p:cNvPr id="2" name="Rectangle 1"/>
@@ -4728,7 +4617,7 @@
           </a:fontRef>
         </p:style>
         <p:txBody>
-          <a:bodyPr wrap="square" lIns="540000" tIns="180000" rtlCol="0" anchor="ctr"/>
+          <a:bodyPr rtlCol="0" anchor="ctr" wrap="square" lIns="540000" tIns="180000"/>
           <a:lstStyle/>
           <a:p>
             <a:pPr algn="l">
@@ -4836,34 +4725,10 @@
                 <a:tableStyleId>{5C22544A-7EE6-4342-B048-85BDC9FD1C3A}</a:tableStyleId>
               </a:tblPr>
               <a:tblGrid>
-                <a:gridCol w="2700000">
-                  <a:extLst>
-                    <a:ext uri="{9D8B030D-6E8A-4147-A177-3AD203B41FA5}">
-                      <a16:colId xmlns:a16="http://schemas.microsoft.com/office/drawing/2014/main" val="20000"/>
-                    </a:ext>
-                  </a:extLst>
-                </a:gridCol>
-                <a:gridCol w="2700000">
-                  <a:extLst>
-                    <a:ext uri="{9D8B030D-6E8A-4147-A177-3AD203B41FA5}">
-                      <a16:colId xmlns:a16="http://schemas.microsoft.com/office/drawing/2014/main" val="20001"/>
-                    </a:ext>
-                  </a:extLst>
-                </a:gridCol>
-                <a:gridCol w="2700000">
-                  <a:extLst>
-                    <a:ext uri="{9D8B030D-6E8A-4147-A177-3AD203B41FA5}">
-                      <a16:colId xmlns:a16="http://schemas.microsoft.com/office/drawing/2014/main" val="20002"/>
-                    </a:ext>
-                  </a:extLst>
-                </a:gridCol>
-                <a:gridCol w="2700000">
-                  <a:extLst>
-                    <a:ext uri="{9D8B030D-6E8A-4147-A177-3AD203B41FA5}">
-                      <a16:colId xmlns:a16="http://schemas.microsoft.com/office/drawing/2014/main" val="20003"/>
-                    </a:ext>
-                  </a:extLst>
-                </a:gridCol>
+                <a:gridCol w="2700000"/>
+                <a:gridCol w="2700000"/>
+                <a:gridCol w="2700000"/>
+                <a:gridCol w="2700000"/>
               </a:tblGrid>
               <a:tr h="431999">
                 <a:tc>
@@ -4962,11 +4827,6 @@
                     </a:solidFill>
                   </a:tcPr>
                 </a:tc>
-                <a:extLst>
-                  <a:ext uri="{0D108BD9-81ED-4DB2-BD59-A6C34878D82A}">
-                    <a16:rowId xmlns:a16="http://schemas.microsoft.com/office/drawing/2014/main" val="10000"/>
-                  </a:ext>
-                </a:extLst>
               </a:tr>
               <a:tr h="431999">
                 <a:tc>
@@ -5007,7 +4867,7 @@
                         </a:defRPr>
                       </a:pPr>
                       <a:r>
-                        <a:t>tenure_WOE</a:t>
+                        <a:t>PaymentMethod</a:t>
                       </a:r>
                     </a:p>
                   </a:txBody>
@@ -5031,7 +4891,7 @@
                         </a:defRPr>
                       </a:pPr>
                       <a:r>
-                        <a:t>0.0592</a:t>
+                        <a:t>0.0566</a:t>
                       </a:r>
                     </a:p>
                   </a:txBody>
@@ -5055,7 +4915,7 @@
                         </a:defRPr>
                       </a:pPr>
                       <a:r>
-                        <a:t>在网时长非线性影响最大</a:t>
+                        <a:t>电子支票支付者风险偏高</a:t>
                       </a:r>
                     </a:p>
                   </a:txBody>
@@ -5065,11 +4925,6 @@
                     </a:solidFill>
                   </a:tcPr>
                 </a:tc>
-                <a:extLst>
-                  <a:ext uri="{0D108BD9-81ED-4DB2-BD59-A6C34878D82A}">
-                    <a16:rowId xmlns:a16="http://schemas.microsoft.com/office/drawing/2014/main" val="10001"/>
-                  </a:ext>
-                </a:extLst>
               </a:tr>
               <a:tr h="431999">
                 <a:tc>
@@ -5106,7 +4961,7 @@
                         </a:defRPr>
                       </a:pPr>
                       <a:r>
-                        <a:t>RFM_Total</a:t>
+                        <a:t>MonthlyCharges</a:t>
                       </a:r>
                     </a:p>
                   </a:txBody>
@@ -5126,7 +4981,7 @@
                         </a:defRPr>
                       </a:pPr>
                       <a:r>
-                        <a:t>0.0592</a:t>
+                        <a:t>0.0566</a:t>
                       </a:r>
                     </a:p>
                   </a:txBody>
@@ -5146,17 +5001,12 @@
                         </a:defRPr>
                       </a:pPr>
                       <a:r>
-                        <a:t>RFM综合评分联合效应</a:t>
+                        <a:t>高消费客户流失倾向略高</a:t>
                       </a:r>
                     </a:p>
                   </a:txBody>
                   <a:tcPr/>
                 </a:tc>
-                <a:extLst>
-                  <a:ext uri="{0D108BD9-81ED-4DB2-BD59-A6C34878D82A}">
-                    <a16:rowId xmlns:a16="http://schemas.microsoft.com/office/drawing/2014/main" val="10002"/>
-                  </a:ext>
-                </a:extLst>
               </a:tr>
               <a:tr h="431999">
                 <a:tc>
@@ -5197,7 +5047,7 @@
                         </a:defRPr>
                       </a:pPr>
                       <a:r>
-                        <a:t>MonthlyCharges</a:t>
+                        <a:t>RFM_Total</a:t>
                       </a:r>
                     </a:p>
                   </a:txBody>
@@ -5221,7 +5071,7 @@
                         </a:defRPr>
                       </a:pPr>
                       <a:r>
-                        <a:t>0.0557</a:t>
+                        <a:t>0.0552</a:t>
                       </a:r>
                     </a:p>
                   </a:txBody>
@@ -5245,7 +5095,7 @@
                         </a:defRPr>
                       </a:pPr>
                       <a:r>
-                        <a:t>高消费客户流失倾向略高</a:t>
+                        <a:t>RFM综合评分联合效应</a:t>
                       </a:r>
                     </a:p>
                   </a:txBody>
@@ -5255,11 +5105,6 @@
                     </a:solidFill>
                   </a:tcPr>
                 </a:tc>
-                <a:extLst>
-                  <a:ext uri="{0D108BD9-81ED-4DB2-BD59-A6C34878D82A}">
-                    <a16:rowId xmlns:a16="http://schemas.microsoft.com/office/drawing/2014/main" val="10003"/>
-                  </a:ext>
-                </a:extLst>
               </a:tr>
               <a:tr h="431999">
                 <a:tc>
@@ -5296,7 +5141,7 @@
                         </a:defRPr>
                       </a:pPr>
                       <a:r>
-                        <a:t>PaymentMethod</a:t>
+                        <a:t>tenure_WOE</a:t>
                       </a:r>
                     </a:p>
                   </a:txBody>
@@ -5316,7 +5161,7 @@
                         </a:defRPr>
                       </a:pPr>
                       <a:r>
-                        <a:t>0.0557</a:t>
+                        <a:t>0.0552</a:t>
                       </a:r>
                     </a:p>
                   </a:txBody>
@@ -5336,17 +5181,12 @@
                         </a:defRPr>
                       </a:pPr>
                       <a:r>
-                        <a:t>电子支票支付者风险偏高</a:t>
+                        <a:t>在网时长非线性影响明显</a:t>
                       </a:r>
                     </a:p>
                   </a:txBody>
                   <a:tcPr/>
                 </a:tc>
-                <a:extLst>
-                  <a:ext uri="{0D108BD9-81ED-4DB2-BD59-A6C34878D82A}">
-                    <a16:rowId xmlns:a16="http://schemas.microsoft.com/office/drawing/2014/main" val="10004"/>
-                  </a:ext>
-                </a:extLst>
               </a:tr>
               <a:tr h="432004">
                 <a:tc>
@@ -5411,7 +5251,7 @@
                         </a:defRPr>
                       </a:pPr>
                       <a:r>
-                        <a:t>0.0271</a:t>
+                        <a:t>0.0272</a:t>
                       </a:r>
                     </a:p>
                   </a:txBody>
@@ -5445,11 +5285,6 @@
                     </a:solidFill>
                   </a:tcPr>
                 </a:tc>
-                <a:extLst>
-                  <a:ext uri="{0D108BD9-81ED-4DB2-BD59-A6C34878D82A}">
-                    <a16:rowId xmlns:a16="http://schemas.microsoft.com/office/drawing/2014/main" val="10005"/>
-                  </a:ext>
-                </a:extLst>
               </a:tr>
             </a:tbl>
           </a:graphicData>
@@ -5510,41 +5345,11 @@
                 <a:tableStyleId>{5C22544A-7EE6-4342-B048-85BDC9FD1C3A}</a:tableStyleId>
               </a:tblPr>
               <a:tblGrid>
-                <a:gridCol w="2160000">
-                  <a:extLst>
-                    <a:ext uri="{9D8B030D-6E8A-4147-A177-3AD203B41FA5}">
-                      <a16:colId xmlns:a16="http://schemas.microsoft.com/office/drawing/2014/main" val="20000"/>
-                    </a:ext>
-                  </a:extLst>
-                </a:gridCol>
-                <a:gridCol w="2160000">
-                  <a:extLst>
-                    <a:ext uri="{9D8B030D-6E8A-4147-A177-3AD203B41FA5}">
-                      <a16:colId xmlns:a16="http://schemas.microsoft.com/office/drawing/2014/main" val="20001"/>
-                    </a:ext>
-                  </a:extLst>
-                </a:gridCol>
-                <a:gridCol w="2160000">
-                  <a:extLst>
-                    <a:ext uri="{9D8B030D-6E8A-4147-A177-3AD203B41FA5}">
-                      <a16:colId xmlns:a16="http://schemas.microsoft.com/office/drawing/2014/main" val="20002"/>
-                    </a:ext>
-                  </a:extLst>
-                </a:gridCol>
-                <a:gridCol w="2160000">
-                  <a:extLst>
-                    <a:ext uri="{9D8B030D-6E8A-4147-A177-3AD203B41FA5}">
-                      <a16:colId xmlns:a16="http://schemas.microsoft.com/office/drawing/2014/main" val="20003"/>
-                    </a:ext>
-                  </a:extLst>
-                </a:gridCol>
-                <a:gridCol w="2160000">
-                  <a:extLst>
-                    <a:ext uri="{9D8B030D-6E8A-4147-A177-3AD203B41FA5}">
-                      <a16:colId xmlns:a16="http://schemas.microsoft.com/office/drawing/2014/main" val="20004"/>
-                    </a:ext>
-                  </a:extLst>
-                </a:gridCol>
+                <a:gridCol w="2160000"/>
+                <a:gridCol w="2160000"/>
+                <a:gridCol w="2160000"/>
+                <a:gridCol w="2160000"/>
+                <a:gridCol w="2160000"/>
               </a:tblGrid>
               <a:tr h="432000">
                 <a:tc>
@@ -5667,11 +5472,6 @@
                     </a:solidFill>
                   </a:tcPr>
                 </a:tc>
-                <a:extLst>
-                  <a:ext uri="{0D108BD9-81ED-4DB2-BD59-A6C34878D82A}">
-                    <a16:rowId xmlns:a16="http://schemas.microsoft.com/office/drawing/2014/main" val="10000"/>
-                  </a:ext>
-                </a:extLst>
               </a:tr>
               <a:tr h="432000">
                 <a:tc>
@@ -5794,11 +5594,6 @@
                     </a:solidFill>
                   </a:tcPr>
                 </a:tc>
-                <a:extLst>
-                  <a:ext uri="{0D108BD9-81ED-4DB2-BD59-A6C34878D82A}">
-                    <a16:rowId xmlns:a16="http://schemas.microsoft.com/office/drawing/2014/main" val="10001"/>
-                  </a:ext>
-                </a:extLst>
               </a:tr>
               <a:tr h="432000">
                 <a:tc>
@@ -5901,11 +5696,6 @@
                   </a:txBody>
                   <a:tcPr/>
                 </a:tc>
-                <a:extLst>
-                  <a:ext uri="{0D108BD9-81ED-4DB2-BD59-A6C34878D82A}">
-                    <a16:rowId xmlns:a16="http://schemas.microsoft.com/office/drawing/2014/main" val="10002"/>
-                  </a:ext>
-                </a:extLst>
               </a:tr>
               <a:tr h="432000">
                 <a:tc>
@@ -6028,11 +5818,6 @@
                     </a:solidFill>
                   </a:tcPr>
                 </a:tc>
-                <a:extLst>
-                  <a:ext uri="{0D108BD9-81ED-4DB2-BD59-A6C34878D82A}">
-                    <a16:rowId xmlns:a16="http://schemas.microsoft.com/office/drawing/2014/main" val="10003"/>
-                  </a:ext>
-                </a:extLst>
               </a:tr>
               <a:tr h="432000">
                 <a:tc>
@@ -6135,11 +5920,6 @@
                   </a:txBody>
                   <a:tcPr/>
                 </a:tc>
-                <a:extLst>
-                  <a:ext uri="{0D108BD9-81ED-4DB2-BD59-A6C34878D82A}">
-                    <a16:rowId xmlns:a16="http://schemas.microsoft.com/office/drawing/2014/main" val="10004"/>
-                  </a:ext>
-                </a:extLst>
               </a:tr>
             </a:tbl>
           </a:graphicData>
@@ -6181,7 +5961,7 @@
           </a:fontRef>
         </p:style>
         <p:txBody>
-          <a:bodyPr wrap="square" rtlCol="0" anchor="ctr"/>
+          <a:bodyPr rtlCol="0" anchor="ctr" wrap="square"/>
           <a:lstStyle/>
           <a:p>
             <a:pPr algn="ctr">
@@ -6193,7 +5973,7 @@
               </a:defRPr>
             </a:pPr>
             <a:r>
-              <a:t>聚类质量：Silhouette Score = 0.xx  |  DBSCAN额外识别异常客户  |  四类客户需差异化运营策略</a:t>
+              <a:t>聚类质量：Silhouette Score = 0.4048  |  DBSCAN识别108个噪声点  |  四类客户需差异化运营策略</a:t>
             </a:r>
           </a:p>
         </p:txBody>
@@ -6207,7 +5987,7 @@
 </file>
 
 <file path=ppt/slides/slide13.xml><?xml version="1.0" encoding="utf-8"?>
-<p:sld xmlns:a="http://schemas.openxmlformats.org/drawingml/2006/main" xmlns:r="http://schemas.openxmlformats.org/officeDocument/2006/relationships" xmlns:p="http://schemas.openxmlformats.org/presentationml/2006/main">
+<p:sld xmlns:a="http://schemas.openxmlformats.org/drawingml/2006/main" xmlns:p="http://schemas.openxmlformats.org/presentationml/2006/main" xmlns:r="http://schemas.openxmlformats.org/officeDocument/2006/relationships">
   <p:cSld>
     <p:bg>
       <p:bgPr>
@@ -6223,14 +6003,7 @@
         <p:cNvGrpSpPr/>
         <p:nvPr/>
       </p:nvGrpSpPr>
-      <p:grpSpPr>
-        <a:xfrm>
-          <a:off x="0" y="0"/>
-          <a:ext cx="0" cy="0"/>
-          <a:chOff x="0" y="0"/>
-          <a:chExt cx="0" cy="0"/>
-        </a:xfrm>
-      </p:grpSpPr>
+      <p:grpSpPr/>
       <p:sp>
         <p:nvSpPr>
           <p:cNvPr id="2" name="Rectangle 1"/>
@@ -6267,7 +6040,7 @@
           </a:fontRef>
         </p:style>
         <p:txBody>
-          <a:bodyPr wrap="square" lIns="540000" tIns="180000" rtlCol="0" anchor="ctr"/>
+          <a:bodyPr rtlCol="0" anchor="ctr" wrap="square" lIns="540000" tIns="180000"/>
           <a:lstStyle/>
           <a:p>
             <a:pPr algn="l">
@@ -6279,7 +6052,7 @@
               </a:defRPr>
             </a:pPr>
             <a:r>
-              <a:t>7. 消融实验 — 验证特征工程有效性</a:t>
+              <a:t>7. 消融实验 — 验证模块贡献</a:t>
             </a:r>
           </a:p>
         </p:txBody>
@@ -6351,7 +6124,7 @@
               </a:defRPr>
             </a:pPr>
             <a:r>
-              <a:t>对比实验：原始特征(19维) vs 原始+RFM+WOE(27维)</a:t>
+              <a:t>对比实验：Base vs RFM vs WOE vs SMOTE（随机森林，同一训练/测试划分）</a:t>
             </a:r>
           </a:p>
         </p:txBody>
@@ -6375,34 +6148,11 @@
                 <a:tableStyleId>{5C22544A-7EE6-4342-B048-85BDC9FD1C3A}</a:tableStyleId>
               </a:tblPr>
               <a:tblGrid>
-                <a:gridCol w="2700000">
-                  <a:extLst>
-                    <a:ext uri="{9D8B030D-6E8A-4147-A177-3AD203B41FA5}">
-                      <a16:colId xmlns:a16="http://schemas.microsoft.com/office/drawing/2014/main" val="20000"/>
-                    </a:ext>
-                  </a:extLst>
-                </a:gridCol>
-                <a:gridCol w="2700000">
-                  <a:extLst>
-                    <a:ext uri="{9D8B030D-6E8A-4147-A177-3AD203B41FA5}">
-                      <a16:colId xmlns:a16="http://schemas.microsoft.com/office/drawing/2014/main" val="20001"/>
-                    </a:ext>
-                  </a:extLst>
-                </a:gridCol>
-                <a:gridCol w="2700000">
-                  <a:extLst>
-                    <a:ext uri="{9D8B030D-6E8A-4147-A177-3AD203B41FA5}">
-                      <a16:colId xmlns:a16="http://schemas.microsoft.com/office/drawing/2014/main" val="20002"/>
-                    </a:ext>
-                  </a:extLst>
-                </a:gridCol>
-                <a:gridCol w="2700000">
-                  <a:extLst>
-                    <a:ext uri="{9D8B030D-6E8A-4147-A177-3AD203B41FA5}">
-                      <a16:colId xmlns:a16="http://schemas.microsoft.com/office/drawing/2014/main" val="20003"/>
-                    </a:ext>
-                  </a:extLst>
-                </a:gridCol>
+                <a:gridCol w="2160000"/>
+                <a:gridCol w="2160000"/>
+                <a:gridCol w="2160000"/>
+                <a:gridCol w="2160000"/>
+                <a:gridCol w="2160000"/>
               </a:tblGrid>
               <a:tr h="432000">
                 <a:tc>
@@ -6443,7 +6193,7 @@
                         </a:defRPr>
                       </a:pPr>
                       <a:r>
-                        <a:t>Logistic Regression AUC</a:t>
+                        <a:t>Accuracy</a:t>
                       </a:r>
                     </a:p>
                   </a:txBody>
@@ -6467,7 +6217,7 @@
                         </a:defRPr>
                       </a:pPr>
                       <a:r>
-                        <a:t>Random Forest AUC</a:t>
+                        <a:t>Precision</a:t>
                       </a:r>
                     </a:p>
                   </a:txBody>
@@ -6491,7 +6241,7 @@
                         </a:defRPr>
                       </a:pPr>
                       <a:r>
-                        <a:t>提升</a:t>
+                        <a:t>Recall</a:t>
                       </a:r>
                     </a:p>
                   </a:txBody>
@@ -6501,11 +6251,30 @@
                     </a:solidFill>
                   </a:tcPr>
                 </a:tc>
-                <a:extLst>
-                  <a:ext uri="{0D108BD9-81ED-4DB2-BD59-A6C34878D82A}">
-                    <a16:rowId xmlns:a16="http://schemas.microsoft.com/office/drawing/2014/main" val="10000"/>
-                  </a:ext>
-                </a:extLst>
+                <a:tc>
+                  <a:txBody>
+                    <a:bodyPr/>
+                    <a:lstStyle/>
+                    <a:p>
+                      <a:pPr algn="ctr">
+                        <a:defRPr sz="1400" b="1">
+                          <a:solidFill>
+                            <a:srgbClr val="FFFFFF"/>
+                          </a:solidFill>
+                          <a:latin typeface="Microsoft YaHei"/>
+                        </a:defRPr>
+                      </a:pPr>
+                      <a:r>
+                        <a:t>F1</a:t>
+                      </a:r>
+                    </a:p>
+                  </a:txBody>
+                  <a:tcPr>
+                    <a:solidFill>
+                      <a:srgbClr val="2E86C1"/>
+                    </a:solidFill>
+                  </a:tcPr>
+                </a:tc>
               </a:tr>
               <a:tr h="432000">
                 <a:tc>
@@ -6522,7 +6291,7 @@
                         </a:defRPr>
                       </a:pPr>
                       <a:r>
-                        <a:t>原始特征（19维）</a:t>
+                        <a:t>Base</a:t>
                       </a:r>
                     </a:p>
                   </a:txBody>
@@ -6546,7 +6315,7 @@
                         </a:defRPr>
                       </a:pPr>
                       <a:r>
-                        <a:t>0.8035</a:t>
+                        <a:t>0.8013</a:t>
                       </a:r>
                     </a:p>
                   </a:txBody>
@@ -6570,7 +6339,7 @@
                         </a:defRPr>
                       </a:pPr>
                       <a:r>
-                        <a:t>0.8221</a:t>
+                        <a:t>0.6632</a:t>
                       </a:r>
                     </a:p>
                   </a:txBody>
@@ -6594,7 +6363,7 @@
                         </a:defRPr>
                       </a:pPr>
                       <a:r>
-                        <a:t>—（基线）</a:t>
+                        <a:t>0.5107</a:t>
                       </a:r>
                     </a:p>
                   </a:txBody>
@@ -6604,13 +6373,6 @@
                     </a:solidFill>
                   </a:tcPr>
                 </a:tc>
-                <a:extLst>
-                  <a:ext uri="{0D108BD9-81ED-4DB2-BD59-A6C34878D82A}">
-                    <a16:rowId xmlns:a16="http://schemas.microsoft.com/office/drawing/2014/main" val="10001"/>
-                  </a:ext>
-                </a:extLst>
-              </a:tr>
-              <a:tr h="432000">
                 <a:tc>
                   <a:txBody>
                     <a:bodyPr/>
@@ -6625,94 +6387,7 @@
                         </a:defRPr>
                       </a:pPr>
                       <a:r>
-                        <a:t>+ RFM特征（23维）</a:t>
-                      </a:r>
-                    </a:p>
-                  </a:txBody>
-                  <a:tcPr/>
-                </a:tc>
-                <a:tc>
-                  <a:txBody>
-                    <a:bodyPr/>
-                    <a:lstStyle/>
-                    <a:p>
-                      <a:pPr algn="ctr">
-                        <a:defRPr sz="1400">
-                          <a:solidFill>
-                            <a:srgbClr val="000000"/>
-                          </a:solidFill>
-                          <a:latin typeface="Microsoft YaHei"/>
-                        </a:defRPr>
-                      </a:pPr>
-                      <a:r>
-                        <a:t>0.8201 (+0.017)</a:t>
-                      </a:r>
-                    </a:p>
-                  </a:txBody>
-                  <a:tcPr/>
-                </a:tc>
-                <a:tc>
-                  <a:txBody>
-                    <a:bodyPr/>
-                    <a:lstStyle/>
-                    <a:p>
-                      <a:pPr algn="ctr">
-                        <a:defRPr sz="1400">
-                          <a:solidFill>
-                            <a:srgbClr val="000000"/>
-                          </a:solidFill>
-                          <a:latin typeface="Microsoft YaHei"/>
-                        </a:defRPr>
-                      </a:pPr>
-                      <a:r>
-                        <a:t>0.8289 (+0.007)</a:t>
-                      </a:r>
-                    </a:p>
-                  </a:txBody>
-                  <a:tcPr/>
-                </a:tc>
-                <a:tc>
-                  <a:txBody>
-                    <a:bodyPr/>
-                    <a:lstStyle/>
-                    <a:p>
-                      <a:pPr algn="ctr">
-                        <a:defRPr sz="1400">
-                          <a:solidFill>
-                            <a:srgbClr val="000000"/>
-                          </a:solidFill>
-                          <a:latin typeface="Microsoft YaHei"/>
-                        </a:defRPr>
-                      </a:pPr>
-                      <a:r>
-                        <a:t>RFM贡献</a:t>
-                      </a:r>
-                    </a:p>
-                  </a:txBody>
-                  <a:tcPr/>
-                </a:tc>
-                <a:extLst>
-                  <a:ext uri="{0D108BD9-81ED-4DB2-BD59-A6C34878D82A}">
-                    <a16:rowId xmlns:a16="http://schemas.microsoft.com/office/drawing/2014/main" val="10002"/>
-                  </a:ext>
-                </a:extLst>
-              </a:tr>
-              <a:tr h="432000">
-                <a:tc>
-                  <a:txBody>
-                    <a:bodyPr/>
-                    <a:lstStyle/>
-                    <a:p>
-                      <a:pPr algn="ctr">
-                        <a:defRPr sz="1400">
-                          <a:solidFill>
-                            <a:srgbClr val="000000"/>
-                          </a:solidFill>
-                          <a:latin typeface="Microsoft YaHei"/>
-                        </a:defRPr>
-                      </a:pPr>
-                      <a:r>
-                        <a:t>+ WOE编码（27维）</a:t>
+                        <a:t>0.5770</a:t>
                       </a:r>
                     </a:p>
                   </a:txBody>
@@ -6722,6 +6397,8 @@
                     </a:solidFill>
                   </a:tcPr>
                 </a:tc>
+              </a:tr>
+              <a:tr h="432000">
                 <a:tc>
                   <a:txBody>
                     <a:bodyPr/>
@@ -6736,7 +6413,109 @@
                         </a:defRPr>
                       </a:pPr>
                       <a:r>
-                        <a:t>0.8359 (+0.032)</a:t>
+                        <a:t>Base+RFM</a:t>
+                      </a:r>
+                    </a:p>
+                  </a:txBody>
+                  <a:tcPr/>
+                </a:tc>
+                <a:tc>
+                  <a:txBody>
+                    <a:bodyPr/>
+                    <a:lstStyle/>
+                    <a:p>
+                      <a:pPr algn="ctr">
+                        <a:defRPr sz="1400">
+                          <a:solidFill>
+                            <a:srgbClr val="000000"/>
+                          </a:solidFill>
+                          <a:latin typeface="Microsoft YaHei"/>
+                        </a:defRPr>
+                      </a:pPr>
+                      <a:r>
+                        <a:t>0.7984</a:t>
+                      </a:r>
+                    </a:p>
+                  </a:txBody>
+                  <a:tcPr/>
+                </a:tc>
+                <a:tc>
+                  <a:txBody>
+                    <a:bodyPr/>
+                    <a:lstStyle/>
+                    <a:p>
+                      <a:pPr algn="ctr">
+                        <a:defRPr sz="1400">
+                          <a:solidFill>
+                            <a:srgbClr val="000000"/>
+                          </a:solidFill>
+                          <a:latin typeface="Microsoft YaHei"/>
+                        </a:defRPr>
+                      </a:pPr>
+                      <a:r>
+                        <a:t>0.6630</a:t>
+                      </a:r>
+                    </a:p>
+                  </a:txBody>
+                  <a:tcPr/>
+                </a:tc>
+                <a:tc>
+                  <a:txBody>
+                    <a:bodyPr/>
+                    <a:lstStyle/>
+                    <a:p>
+                      <a:pPr algn="ctr">
+                        <a:defRPr sz="1400">
+                          <a:solidFill>
+                            <a:srgbClr val="000000"/>
+                          </a:solidFill>
+                          <a:latin typeface="Microsoft YaHei"/>
+                        </a:defRPr>
+                      </a:pPr>
+                      <a:r>
+                        <a:t>0.4893</a:t>
+                      </a:r>
+                    </a:p>
+                  </a:txBody>
+                  <a:tcPr/>
+                </a:tc>
+                <a:tc>
+                  <a:txBody>
+                    <a:bodyPr/>
+                    <a:lstStyle/>
+                    <a:p>
+                      <a:pPr algn="ctr">
+                        <a:defRPr sz="1400">
+                          <a:solidFill>
+                            <a:srgbClr val="000000"/>
+                          </a:solidFill>
+                          <a:latin typeface="Microsoft YaHei"/>
+                        </a:defRPr>
+                      </a:pPr>
+                      <a:r>
+                        <a:t>0.5631</a:t>
+                      </a:r>
+                    </a:p>
+                  </a:txBody>
+                  <a:tcPr/>
+                </a:tc>
+              </a:tr>
+              <a:tr h="432000">
+                <a:tc>
+                  <a:txBody>
+                    <a:bodyPr/>
+                    <a:lstStyle/>
+                    <a:p>
+                      <a:pPr algn="ctr">
+                        <a:defRPr sz="1400">
+                          <a:solidFill>
+                            <a:srgbClr val="000000"/>
+                          </a:solidFill>
+                          <a:latin typeface="Microsoft YaHei"/>
+                        </a:defRPr>
+                      </a:pPr>
+                      <a:r>
+                        <a:t>Base+RFM+WOE</a:t>
                       </a:r>
                     </a:p>
                   </a:txBody>
@@ -6760,7 +6539,7 @@
                         </a:defRPr>
                       </a:pPr>
                       <a:r>
-                        <a:t>0.8382 (+0.016)</a:t>
+                        <a:t>0.7956</a:t>
                       </a:r>
                     </a:p>
                   </a:txBody>
@@ -6784,7 +6563,7 @@
                         </a:defRPr>
                       </a:pPr>
                       <a:r>
-                        <a:t>WOE贡献</a:t>
+                        <a:t>0.6536</a:t>
                       </a:r>
                     </a:p>
                   </a:txBody>
@@ -6794,11 +6573,54 @@
                     </a:solidFill>
                   </a:tcPr>
                 </a:tc>
-                <a:extLst>
-                  <a:ext uri="{0D108BD9-81ED-4DB2-BD59-A6C34878D82A}">
-                    <a16:rowId xmlns:a16="http://schemas.microsoft.com/office/drawing/2014/main" val="10003"/>
-                  </a:ext>
-                </a:extLst>
+                <a:tc>
+                  <a:txBody>
+                    <a:bodyPr/>
+                    <a:lstStyle/>
+                    <a:p>
+                      <a:pPr algn="ctr">
+                        <a:defRPr sz="1400">
+                          <a:solidFill>
+                            <a:srgbClr val="000000"/>
+                          </a:solidFill>
+                          <a:latin typeface="Microsoft YaHei"/>
+                        </a:defRPr>
+                      </a:pPr>
+                      <a:r>
+                        <a:t>0.4893</a:t>
+                      </a:r>
+                    </a:p>
+                  </a:txBody>
+                  <a:tcPr>
+                    <a:solidFill>
+                      <a:srgbClr val="D6EAF8"/>
+                    </a:solidFill>
+                  </a:tcPr>
+                </a:tc>
+                <a:tc>
+                  <a:txBody>
+                    <a:bodyPr/>
+                    <a:lstStyle/>
+                    <a:p>
+                      <a:pPr algn="ctr">
+                        <a:defRPr sz="1400">
+                          <a:solidFill>
+                            <a:srgbClr val="000000"/>
+                          </a:solidFill>
+                          <a:latin typeface="Microsoft YaHei"/>
+                        </a:defRPr>
+                      </a:pPr>
+                      <a:r>
+                        <a:t>0.5596</a:t>
+                      </a:r>
+                    </a:p>
+                  </a:txBody>
+                  <a:tcPr>
+                    <a:solidFill>
+                      <a:srgbClr val="D6EAF8"/>
+                    </a:solidFill>
+                  </a:tcPr>
+                </a:tc>
               </a:tr>
               <a:tr h="432000">
                 <a:tc>
@@ -6815,7 +6637,7 @@
                         </a:defRPr>
                       </a:pPr>
                       <a:r>
-                        <a:t>+ SMOTE过采样</a:t>
+                        <a:t>Base+RFM+WOE+SMOTE</a:t>
                       </a:r>
                     </a:p>
                   </a:txBody>
@@ -6835,7 +6657,7 @@
                         </a:defRPr>
                       </a:pPr>
                       <a:r>
-                        <a:t>Recall: 0.45→0.69</a:t>
+                        <a:t>0.7786</a:t>
                       </a:r>
                     </a:p>
                   </a:txBody>
@@ -6855,7 +6677,7 @@
                         </a:defRPr>
                       </a:pPr>
                       <a:r>
-                        <a:t>Recall: 0.48→0.71</a:t>
+                        <a:t>0.5662</a:t>
                       </a:r>
                     </a:p>
                   </a:txBody>
@@ -6875,17 +6697,32 @@
                         </a:defRPr>
                       </a:pPr>
                       <a:r>
-                        <a:t>SMOTE贡献</a:t>
+                        <a:t>0.7086</a:t>
                       </a:r>
                     </a:p>
                   </a:txBody>
                   <a:tcPr/>
                 </a:tc>
-                <a:extLst>
-                  <a:ext uri="{0D108BD9-81ED-4DB2-BD59-A6C34878D82A}">
-                    <a16:rowId xmlns:a16="http://schemas.microsoft.com/office/drawing/2014/main" val="10004"/>
-                  </a:ext>
-                </a:extLst>
+                <a:tc>
+                  <a:txBody>
+                    <a:bodyPr/>
+                    <a:lstStyle/>
+                    <a:p>
+                      <a:pPr algn="ctr">
+                        <a:defRPr sz="1400">
+                          <a:solidFill>
+                            <a:srgbClr val="000000"/>
+                          </a:solidFill>
+                          <a:latin typeface="Microsoft YaHei"/>
+                        </a:defRPr>
+                      </a:pPr>
+                      <a:r>
+                        <a:t>0.6295</a:t>
+                      </a:r>
+                    </a:p>
+                  </a:txBody>
+                  <a:tcPr/>
+                </a:tc>
               </a:tr>
             </a:tbl>
           </a:graphicData>
@@ -6926,19 +6763,19 @@
             </a:r>
             <a:br/>
             <a:r>
-              <a:t>• RFM特征对逻辑回归提升最大（+0.017），因为线性模型需要人工构建非线性特征</a:t>
+              <a:t>• RFM/WOE在随机森林上没有明显提升AUC，说明树模型已能捕捉较多非线性关系</a:t>
             </a:r>
             <a:br/>
             <a:r>
-              <a:t>• WOE分箱进一步提升了逻辑回归（+0.015），验证了证据权重编码的有效性</a:t>
+              <a:t>• SMOTE是Recall提升的关键：0.4893 → 0.7086</a:t>
             </a:r>
             <a:br/>
             <a:r>
-              <a:t>• SMOTE是Recall提升的关键（+25个百分点），比特征工程对召回率的贡献更大</a:t>
+              <a:t>• F1从0.5596提升到0.6295，更符合流失预警的业务目标</a:t>
             </a:r>
             <a:br/>
             <a:r>
-              <a:t>• 随机森林本身具有非线性能力，特征工程收益相对较小但仍有正向贡献</a:t>
+              <a:t>• RFM/WOE仍提供可解释的业务特征，便于报告和策略落地</a:t>
             </a:r>
           </a:p>
         </p:txBody>
@@ -6952,7 +6789,7 @@
 </file>
 
 <file path=ppt/slides/slide14.xml><?xml version="1.0" encoding="utf-8"?>
-<p:sld xmlns:a="http://schemas.openxmlformats.org/drawingml/2006/main" xmlns:r="http://schemas.openxmlformats.org/officeDocument/2006/relationships" xmlns:p="http://schemas.openxmlformats.org/presentationml/2006/main">
+<p:sld xmlns:a="http://schemas.openxmlformats.org/drawingml/2006/main" xmlns:p="http://schemas.openxmlformats.org/presentationml/2006/main" xmlns:r="http://schemas.openxmlformats.org/officeDocument/2006/relationships">
   <p:cSld>
     <p:bg>
       <p:bgPr>
@@ -6968,14 +6805,7 @@
         <p:cNvGrpSpPr/>
         <p:nvPr/>
       </p:nvGrpSpPr>
-      <p:grpSpPr>
-        <a:xfrm>
-          <a:off x="0" y="0"/>
-          <a:ext cx="0" cy="0"/>
-          <a:chOff x="0" y="0"/>
-          <a:chExt cx="0" cy="0"/>
-        </a:xfrm>
-      </p:grpSpPr>
+      <p:grpSpPr/>
       <p:sp>
         <p:nvSpPr>
           <p:cNvPr id="2" name="Rectangle 1"/>
@@ -7012,7 +6842,7 @@
           </a:fontRef>
         </p:style>
         <p:txBody>
-          <a:bodyPr wrap="square" lIns="540000" tIns="180000" rtlCol="0" anchor="ctr"/>
+          <a:bodyPr rtlCol="0" anchor="ctr" wrap="square" lIns="540000" tIns="180000"/>
           <a:lstStyle/>
           <a:p>
             <a:pPr algn="l">
@@ -7154,7 +6984,7 @@
           </a:fontRef>
         </p:style>
         <p:txBody>
-          <a:bodyPr wrap="square" rtlCol="0" anchor="ctr"/>
+          <a:bodyPr rtlCol="0" anchor="ctr" wrap="square"/>
           <a:lstStyle/>
           <a:p>
             <a:pPr algn="ctr">
@@ -7274,7 +7104,7 @@
           </a:fontRef>
         </p:style>
         <p:txBody>
-          <a:bodyPr wrap="square" rtlCol="0" anchor="ctr"/>
+          <a:bodyPr rtlCol="0" anchor="ctr" wrap="square"/>
           <a:lstStyle/>
           <a:p>
             <a:pPr algn="ctr">
@@ -7394,7 +7224,7 @@
           </a:fontRef>
         </p:style>
         <p:txBody>
-          <a:bodyPr wrap="square" rtlCol="0" anchor="ctr"/>
+          <a:bodyPr rtlCol="0" anchor="ctr" wrap="square"/>
           <a:lstStyle/>
           <a:p>
             <a:pPr algn="ctr">
@@ -7518,7 +7348,7 @@
           </a:fontRef>
         </p:style>
         <p:txBody>
-          <a:bodyPr wrap="square" rtlCol="0" anchor="ctr"/>
+          <a:bodyPr rtlCol="0" anchor="ctr" wrap="square"/>
           <a:lstStyle/>
           <a:p>
             <a:pPr algn="ctr">
@@ -7642,7 +7472,7 @@
           </a:fontRef>
         </p:style>
         <p:txBody>
-          <a:bodyPr wrap="square" rtlCol="0" anchor="ctr"/>
+          <a:bodyPr rtlCol="0" anchor="ctr" wrap="square"/>
           <a:lstStyle/>
           <a:p>
             <a:pPr algn="ctr">
@@ -7766,7 +7596,7 @@
           </a:fontRef>
         </p:style>
         <p:txBody>
-          <a:bodyPr wrap="square" rtlCol="0" anchor="ctr"/>
+          <a:bodyPr rtlCol="0" anchor="ctr" wrap="square"/>
           <a:lstStyle/>
           <a:p>
             <a:pPr algn="ctr">
@@ -7810,7 +7640,7 @@
 </file>
 
 <file path=ppt/slides/slide15.xml><?xml version="1.0" encoding="utf-8"?>
-<p:sld xmlns:a="http://schemas.openxmlformats.org/drawingml/2006/main" xmlns:r="http://schemas.openxmlformats.org/officeDocument/2006/relationships" xmlns:p="http://schemas.openxmlformats.org/presentationml/2006/main">
+<p:sld xmlns:a="http://schemas.openxmlformats.org/drawingml/2006/main" xmlns:p="http://schemas.openxmlformats.org/presentationml/2006/main" xmlns:r="http://schemas.openxmlformats.org/officeDocument/2006/relationships">
   <p:cSld>
     <p:bg>
       <p:bgPr>
@@ -7826,14 +7656,7 @@
         <p:cNvGrpSpPr/>
         <p:nvPr/>
       </p:nvGrpSpPr>
-      <p:grpSpPr>
-        <a:xfrm>
-          <a:off x="0" y="0"/>
-          <a:ext cx="0" cy="0"/>
-          <a:chOff x="0" y="0"/>
-          <a:chExt cx="0" cy="0"/>
-        </a:xfrm>
-      </p:grpSpPr>
+      <p:grpSpPr/>
       <p:sp>
         <p:nvSpPr>
           <p:cNvPr id="2" name="Rectangle 1"/>
@@ -7870,7 +7693,7 @@
           </a:fontRef>
         </p:style>
         <p:txBody>
-          <a:bodyPr wrap="square" lIns="540000" tIns="180000" rtlCol="0" anchor="ctr"/>
+          <a:bodyPr rtlCol="0" anchor="ctr" wrap="square" lIns="540000" tIns="180000"/>
           <a:lstStyle/>
           <a:p>
             <a:pPr algn="l">
@@ -8009,7 +7832,7 @@
               </a:defRPr>
             </a:pPr>
             <a:r>
-              <a:t>✅ 随机森林最优：ROC-AUC=0.8382，Recall=0.7139</a:t>
+              <a:t>✅ 随机森林最优：ROC-AUC=0.8386，Recall=0.7086</a:t>
             </a:r>
           </a:p>
           <a:p>
@@ -8025,7 +7848,7 @@
               </a:defRPr>
             </a:pPr>
             <a:r>
-              <a:t>✅ RFM+WOE特征工程为线性模型带来+0.032 AUC提升</a:t>
+              <a:t>✅ 交叉验证使用折内SMOTE Pipeline，避免验证集泄漏</a:t>
             </a:r>
           </a:p>
           <a:p>
@@ -8041,7 +7864,7 @@
               </a:defRPr>
             </a:pPr>
             <a:r>
-              <a:t>✅ SMOTE将流失客户召回率提升约30个百分点</a:t>
+              <a:t>✅ SMOTE将Recall从0.4893提升到0.7086</a:t>
             </a:r>
           </a:p>
           <a:p>
@@ -8253,7 +8076,7 @@
           </a:fontRef>
         </p:style>
         <p:txBody>
-          <a:bodyPr wrap="square" rtlCol="0" anchor="ctr"/>
+          <a:bodyPr rtlCol="0" anchor="ctr" wrap="square"/>
           <a:lstStyle/>
           <a:p>
             <a:pPr algn="ctr">
@@ -8279,7 +8102,7 @@
 </file>
 
 <file path=ppt/slides/slide2.xml><?xml version="1.0" encoding="utf-8"?>
-<p:sld xmlns:a="http://schemas.openxmlformats.org/drawingml/2006/main" xmlns:r="http://schemas.openxmlformats.org/officeDocument/2006/relationships" xmlns:p="http://schemas.openxmlformats.org/presentationml/2006/main">
+<p:sld xmlns:a="http://schemas.openxmlformats.org/drawingml/2006/main" xmlns:p="http://schemas.openxmlformats.org/presentationml/2006/main" xmlns:r="http://schemas.openxmlformats.org/officeDocument/2006/relationships">
   <p:cSld>
     <p:bg>
       <p:bgPr>
@@ -8295,14 +8118,7 @@
         <p:cNvGrpSpPr/>
         <p:nvPr/>
       </p:nvGrpSpPr>
-      <p:grpSpPr>
-        <a:xfrm>
-          <a:off x="0" y="0"/>
-          <a:ext cx="0" cy="0"/>
-          <a:chOff x="0" y="0"/>
-          <a:chExt cx="0" cy="0"/>
-        </a:xfrm>
-      </p:grpSpPr>
+      <p:grpSpPr/>
       <p:sp>
         <p:nvSpPr>
           <p:cNvPr id="2" name="Rectangle 1"/>
@@ -8339,7 +8155,7 @@
           </a:fontRef>
         </p:style>
         <p:txBody>
-          <a:bodyPr wrap="square" lIns="540000" tIns="180000" rtlCol="0" anchor="ctr"/>
+          <a:bodyPr rtlCol="0" anchor="ctr" wrap="square" lIns="540000" tIns="180000"/>
           <a:lstStyle/>
           <a:p>
             <a:pPr algn="l">
@@ -8584,7 +8400,7 @@
 </file>
 
 <file path=ppt/slides/slide3.xml><?xml version="1.0" encoding="utf-8"?>
-<p:sld xmlns:a="http://schemas.openxmlformats.org/drawingml/2006/main" xmlns:r="http://schemas.openxmlformats.org/officeDocument/2006/relationships" xmlns:p="http://schemas.openxmlformats.org/presentationml/2006/main">
+<p:sld xmlns:a="http://schemas.openxmlformats.org/drawingml/2006/main" xmlns:p="http://schemas.openxmlformats.org/presentationml/2006/main" xmlns:r="http://schemas.openxmlformats.org/officeDocument/2006/relationships">
   <p:cSld>
     <p:bg>
       <p:bgPr>
@@ -8600,14 +8416,7 @@
         <p:cNvGrpSpPr/>
         <p:nvPr/>
       </p:nvGrpSpPr>
-      <p:grpSpPr>
-        <a:xfrm>
-          <a:off x="0" y="0"/>
-          <a:ext cx="0" cy="0"/>
-          <a:chOff x="0" y="0"/>
-          <a:chExt cx="0" cy="0"/>
-        </a:xfrm>
-      </p:grpSpPr>
+      <p:grpSpPr/>
       <p:sp>
         <p:nvSpPr>
           <p:cNvPr id="2" name="Rectangle 1"/>
@@ -8644,7 +8453,7 @@
           </a:fontRef>
         </p:style>
         <p:txBody>
-          <a:bodyPr wrap="square" lIns="540000" tIns="180000" rtlCol="0" anchor="ctr"/>
+          <a:bodyPr rtlCol="0" anchor="ctr" wrap="square" lIns="540000" tIns="180000"/>
           <a:lstStyle/>
           <a:p>
             <a:pPr algn="l">
@@ -9027,7 +8836,7 @@
           </a:fontRef>
         </p:style>
         <p:txBody>
-          <a:bodyPr wrap="square" rtlCol="0" anchor="ctr"/>
+          <a:bodyPr rtlCol="0" anchor="ctr" wrap="square"/>
           <a:lstStyle/>
           <a:p>
             <a:pPr algn="ctr">
@@ -9053,7 +8862,7 @@
 </file>
 
 <file path=ppt/slides/slide4.xml><?xml version="1.0" encoding="utf-8"?>
-<p:sld xmlns:a="http://schemas.openxmlformats.org/drawingml/2006/main" xmlns:r="http://schemas.openxmlformats.org/officeDocument/2006/relationships" xmlns:p="http://schemas.openxmlformats.org/presentationml/2006/main">
+<p:sld xmlns:a="http://schemas.openxmlformats.org/drawingml/2006/main" xmlns:p="http://schemas.openxmlformats.org/presentationml/2006/main" xmlns:r="http://schemas.openxmlformats.org/officeDocument/2006/relationships">
   <p:cSld>
     <p:bg>
       <p:bgPr>
@@ -9069,14 +8878,7 @@
         <p:cNvGrpSpPr/>
         <p:nvPr/>
       </p:nvGrpSpPr>
-      <p:grpSpPr>
-        <a:xfrm>
-          <a:off x="0" y="0"/>
-          <a:ext cx="0" cy="0"/>
-          <a:chOff x="0" y="0"/>
-          <a:chExt cx="0" cy="0"/>
-        </a:xfrm>
-      </p:grpSpPr>
+      <p:grpSpPr/>
       <p:sp>
         <p:nvSpPr>
           <p:cNvPr id="2" name="Rectangle 1"/>
@@ -9113,7 +8915,7 @@
           </a:fontRef>
         </p:style>
         <p:txBody>
-          <a:bodyPr wrap="square" lIns="540000" tIns="180000" rtlCol="0" anchor="ctr"/>
+          <a:bodyPr rtlCol="0" anchor="ctr" wrap="square" lIns="540000" tIns="180000"/>
           <a:lstStyle/>
           <a:p>
             <a:pPr algn="l">
@@ -9212,7 +9014,7 @@
         </p:nvGraphicFramePr>
         <p:xfrm>
           <a:off x="540000" y="1800000"/>
-          <a:ext cx="10800000" cy="2271360"/>
+          <a:ext cx="10800000" cy="2160000"/>
         </p:xfrm>
         <a:graphic>
           <a:graphicData uri="http://schemas.openxmlformats.org/drawingml/2006/table">
@@ -9221,27 +9023,9 @@
                 <a:tableStyleId>{5C22544A-7EE6-4342-B048-85BDC9FD1C3A}</a:tableStyleId>
               </a:tblPr>
               <a:tblGrid>
-                <a:gridCol w="3600000">
-                  <a:extLst>
-                    <a:ext uri="{9D8B030D-6E8A-4147-A177-3AD203B41FA5}">
-                      <a16:colId xmlns:a16="http://schemas.microsoft.com/office/drawing/2014/main" val="20000"/>
-                    </a:ext>
-                  </a:extLst>
-                </a:gridCol>
-                <a:gridCol w="3600000">
-                  <a:extLst>
-                    <a:ext uri="{9D8B030D-6E8A-4147-A177-3AD203B41FA5}">
-                      <a16:colId xmlns:a16="http://schemas.microsoft.com/office/drawing/2014/main" val="20001"/>
-                    </a:ext>
-                  </a:extLst>
-                </a:gridCol>
-                <a:gridCol w="3600000">
-                  <a:extLst>
-                    <a:ext uri="{9D8B030D-6E8A-4147-A177-3AD203B41FA5}">
-                      <a16:colId xmlns:a16="http://schemas.microsoft.com/office/drawing/2014/main" val="20002"/>
-                    </a:ext>
-                  </a:extLst>
-                </a:gridCol>
+                <a:gridCol w="3600000"/>
+                <a:gridCol w="3600000"/>
+                <a:gridCol w="3600000"/>
               </a:tblGrid>
               <a:tr h="432000">
                 <a:tc>
@@ -9316,11 +9100,6 @@
                     </a:solidFill>
                   </a:tcPr>
                 </a:tc>
-                <a:extLst>
-                  <a:ext uri="{0D108BD9-81ED-4DB2-BD59-A6C34878D82A}">
-                    <a16:rowId xmlns:a16="http://schemas.microsoft.com/office/drawing/2014/main" val="10000"/>
-                  </a:ext>
-                </a:extLst>
               </a:tr>
               <a:tr h="432000">
                 <a:tc>
@@ -9395,11 +9174,6 @@
                     </a:solidFill>
                   </a:tcPr>
                 </a:tc>
-                <a:extLst>
-                  <a:ext uri="{0D108BD9-81ED-4DB2-BD59-A6C34878D82A}">
-                    <a16:rowId xmlns:a16="http://schemas.microsoft.com/office/drawing/2014/main" val="10001"/>
-                  </a:ext>
-                </a:extLst>
               </a:tr>
               <a:tr h="432000">
                 <a:tc>
@@ -9462,11 +9236,6 @@
                   </a:txBody>
                   <a:tcPr/>
                 </a:tc>
-                <a:extLst>
-                  <a:ext uri="{0D108BD9-81ED-4DB2-BD59-A6C34878D82A}">
-                    <a16:rowId xmlns:a16="http://schemas.microsoft.com/office/drawing/2014/main" val="10002"/>
-                  </a:ext>
-                </a:extLst>
               </a:tr>
               <a:tr h="432000">
                 <a:tc>
@@ -9541,11 +9310,6 @@
                     </a:solidFill>
                   </a:tcPr>
                 </a:tc>
-                <a:extLst>
-                  <a:ext uri="{0D108BD9-81ED-4DB2-BD59-A6C34878D82A}">
-                    <a16:rowId xmlns:a16="http://schemas.microsoft.com/office/drawing/2014/main" val="10003"/>
-                  </a:ext>
-                </a:extLst>
               </a:tr>
               <a:tr h="432000">
                 <a:tc>
@@ -9608,11 +9372,6 @@
                   </a:txBody>
                   <a:tcPr/>
                 </a:tc>
-                <a:extLst>
-                  <a:ext uri="{0D108BD9-81ED-4DB2-BD59-A6C34878D82A}">
-                    <a16:rowId xmlns:a16="http://schemas.microsoft.com/office/drawing/2014/main" val="10004"/>
-                  </a:ext>
-                </a:extLst>
               </a:tr>
             </a:tbl>
           </a:graphicData>
@@ -9663,7 +9422,7 @@
 </file>
 
 <file path=ppt/slides/slide5.xml><?xml version="1.0" encoding="utf-8"?>
-<p:sld xmlns:a="http://schemas.openxmlformats.org/drawingml/2006/main" xmlns:r="http://schemas.openxmlformats.org/officeDocument/2006/relationships" xmlns:p="http://schemas.openxmlformats.org/presentationml/2006/main">
+<p:sld xmlns:a="http://schemas.openxmlformats.org/drawingml/2006/main" xmlns:p="http://schemas.openxmlformats.org/presentationml/2006/main" xmlns:r="http://schemas.openxmlformats.org/officeDocument/2006/relationships">
   <p:cSld>
     <p:bg>
       <p:bgPr>
@@ -9679,14 +9438,7 @@
         <p:cNvGrpSpPr/>
         <p:nvPr/>
       </p:nvGrpSpPr>
-      <p:grpSpPr>
-        <a:xfrm>
-          <a:off x="0" y="0"/>
-          <a:ext cx="0" cy="0"/>
-          <a:chOff x="0" y="0"/>
-          <a:chExt cx="0" cy="0"/>
-        </a:xfrm>
-      </p:grpSpPr>
+      <p:grpSpPr/>
       <p:sp>
         <p:nvSpPr>
           <p:cNvPr id="2" name="Rectangle 1"/>
@@ -9723,7 +9475,7 @@
           </a:fontRef>
         </p:style>
         <p:txBody>
-          <a:bodyPr wrap="square" lIns="540000" tIns="180000" rtlCol="0" anchor="ctr"/>
+          <a:bodyPr rtlCol="0" anchor="ctr" wrap="square" lIns="540000" tIns="180000"/>
           <a:lstStyle/>
           <a:p>
             <a:pPr algn="l">
@@ -9812,7 +9564,7 @@
           </a:fontRef>
         </p:style>
         <p:txBody>
-          <a:bodyPr wrap="square" rtlCol="0" anchor="ctr"/>
+          <a:bodyPr rtlCol="0" anchor="ctr" wrap="square"/>
           <a:lstStyle/>
           <a:p>
             <a:pPr algn="ctr">
@@ -9865,7 +9617,7 @@
           </a:fontRef>
         </p:style>
         <p:txBody>
-          <a:bodyPr wrap="square" rtlCol="0" anchor="ctr"/>
+          <a:bodyPr rtlCol="0" anchor="ctr" wrap="square"/>
           <a:lstStyle/>
           <a:p>
             <a:pPr algn="ctr">
@@ -9934,7 +9686,6 @@
           <a:lstStyle/>
           <a:p>
             <a:pPr algn="ctr"/>
-            <a:endParaRPr/>
           </a:p>
         </p:txBody>
       </p:sp>
@@ -9974,7 +9725,7 @@
           </a:fontRef>
         </p:style>
         <p:txBody>
-          <a:bodyPr wrap="square" rtlCol="0" anchor="ctr"/>
+          <a:bodyPr rtlCol="0" anchor="ctr" wrap="square"/>
           <a:lstStyle/>
           <a:p>
             <a:pPr algn="ctr">
@@ -10027,7 +9778,7 @@
           </a:fontRef>
         </p:style>
         <p:txBody>
-          <a:bodyPr wrap="square" rtlCol="0" anchor="ctr"/>
+          <a:bodyPr rtlCol="0" anchor="ctr" wrap="square"/>
           <a:lstStyle/>
           <a:p>
             <a:pPr algn="ctr">
@@ -10096,7 +9847,6 @@
           <a:lstStyle/>
           <a:p>
             <a:pPr algn="ctr"/>
-            <a:endParaRPr/>
           </a:p>
         </p:txBody>
       </p:sp>
@@ -10136,7 +9886,7 @@
           </a:fontRef>
         </p:style>
         <p:txBody>
-          <a:bodyPr wrap="square" rtlCol="0" anchor="ctr"/>
+          <a:bodyPr rtlCol="0" anchor="ctr" wrap="square"/>
           <a:lstStyle/>
           <a:p>
             <a:pPr algn="ctr">
@@ -10189,7 +9939,7 @@
           </a:fontRef>
         </p:style>
         <p:txBody>
-          <a:bodyPr wrap="square" rtlCol="0" anchor="ctr"/>
+          <a:bodyPr rtlCol="0" anchor="ctr" wrap="square"/>
           <a:lstStyle/>
           <a:p>
             <a:pPr algn="ctr">
@@ -10258,7 +10008,6 @@
           <a:lstStyle/>
           <a:p>
             <a:pPr algn="ctr"/>
-            <a:endParaRPr/>
           </a:p>
         </p:txBody>
       </p:sp>
@@ -10298,7 +10047,7 @@
           </a:fontRef>
         </p:style>
         <p:txBody>
-          <a:bodyPr wrap="square" rtlCol="0" anchor="ctr"/>
+          <a:bodyPr rtlCol="0" anchor="ctr" wrap="square"/>
           <a:lstStyle/>
           <a:p>
             <a:pPr algn="ctr">
@@ -10351,7 +10100,7 @@
           </a:fontRef>
         </p:style>
         <p:txBody>
-          <a:bodyPr wrap="square" rtlCol="0" anchor="ctr"/>
+          <a:bodyPr rtlCol="0" anchor="ctr" wrap="square"/>
           <a:lstStyle/>
           <a:p>
             <a:pPr algn="ctr">
@@ -10452,7 +10201,7 @@
           </a:fontRef>
         </p:style>
         <p:txBody>
-          <a:bodyPr wrap="square" rtlCol="0" anchor="ctr"/>
+          <a:bodyPr rtlCol="0" anchor="ctr" wrap="square"/>
           <a:lstStyle/>
           <a:p>
             <a:pPr algn="ctr">
@@ -10478,7 +10227,7 @@
 </file>
 
 <file path=ppt/slides/slide6.xml><?xml version="1.0" encoding="utf-8"?>
-<p:sld xmlns:a="http://schemas.openxmlformats.org/drawingml/2006/main" xmlns:r="http://schemas.openxmlformats.org/officeDocument/2006/relationships" xmlns:p="http://schemas.openxmlformats.org/presentationml/2006/main">
+<p:sld xmlns:a="http://schemas.openxmlformats.org/drawingml/2006/main" xmlns:p="http://schemas.openxmlformats.org/presentationml/2006/main" xmlns:r="http://schemas.openxmlformats.org/officeDocument/2006/relationships">
   <p:cSld>
     <p:bg>
       <p:bgPr>
@@ -10494,14 +10243,7 @@
         <p:cNvGrpSpPr/>
         <p:nvPr/>
       </p:nvGrpSpPr>
-      <p:grpSpPr>
-        <a:xfrm>
-          <a:off x="0" y="0"/>
-          <a:ext cx="0" cy="0"/>
-          <a:chOff x="0" y="0"/>
-          <a:chExt cx="0" cy="0"/>
-        </a:xfrm>
-      </p:grpSpPr>
+      <p:grpSpPr/>
       <p:sp>
         <p:nvSpPr>
           <p:cNvPr id="2" name="Rectangle 1"/>
@@ -10538,7 +10280,7 @@
           </a:fontRef>
         </p:style>
         <p:txBody>
-          <a:bodyPr wrap="square" lIns="540000" tIns="180000" rtlCol="0" anchor="ctr"/>
+          <a:bodyPr rtlCol="0" anchor="ctr" wrap="square" lIns="540000" tIns="180000"/>
           <a:lstStyle/>
           <a:p>
             <a:pPr algn="l">
@@ -10863,7 +10605,6 @@
                 <a:latin typeface="Microsoft YaHei"/>
               </a:defRPr>
             </a:pPr>
-            <a:endParaRPr/>
           </a:p>
           <a:p>
             <a:pPr>
@@ -10909,7 +10650,6 @@
                 <a:latin typeface="Microsoft YaHei"/>
               </a:defRPr>
             </a:pPr>
-            <a:endParaRPr/>
           </a:p>
           <a:p>
             <a:pPr>
@@ -10939,7 +10679,6 @@
                 <a:latin typeface="Microsoft YaHei"/>
               </a:defRPr>
             </a:pPr>
-            <a:endParaRPr/>
           </a:p>
           <a:p>
             <a:pPr>
@@ -10954,7 +10693,7 @@
               </a:defRPr>
             </a:pPr>
             <a:r>
-              <a:t>→ 原始19维 → 27维特征空间</a:t>
+              <a:t>→ Base / RFM / WOE / SMOTE分层验证</a:t>
             </a:r>
           </a:p>
         </p:txBody>
@@ -10995,7 +10734,7 @@
           </a:fontRef>
         </p:style>
         <p:txBody>
-          <a:bodyPr wrap="square" rtlCol="0" anchor="ctr"/>
+          <a:bodyPr rtlCol="0" anchor="ctr" wrap="square"/>
           <a:lstStyle/>
           <a:p>
             <a:pPr algn="ctr">
@@ -11007,7 +10746,7 @@
               </a:defRPr>
             </a:pPr>
             <a:r>
-              <a:t>特征工程效果：逻辑回归 AUC 提升 +0.032（0.8035 → 0.8359）</a:t>
+              <a:t>关键控制：WOE仅用训练集拟合；交叉验证中SMOTE只在每个训练折内部执行</a:t>
             </a:r>
           </a:p>
         </p:txBody>
@@ -11021,7 +10760,7 @@
 </file>
 
 <file path=ppt/slides/slide7.xml><?xml version="1.0" encoding="utf-8"?>
-<p:sld xmlns:a="http://schemas.openxmlformats.org/drawingml/2006/main" xmlns:r="http://schemas.openxmlformats.org/officeDocument/2006/relationships" xmlns:p="http://schemas.openxmlformats.org/presentationml/2006/main">
+<p:sld xmlns:a="http://schemas.openxmlformats.org/drawingml/2006/main" xmlns:p="http://schemas.openxmlformats.org/presentationml/2006/main" xmlns:r="http://schemas.openxmlformats.org/officeDocument/2006/relationships">
   <p:cSld>
     <p:bg>
       <p:bgPr>
@@ -11037,14 +10776,7 @@
         <p:cNvGrpSpPr/>
         <p:nvPr/>
       </p:nvGrpSpPr>
-      <p:grpSpPr>
-        <a:xfrm>
-          <a:off x="0" y="0"/>
-          <a:ext cx="0" cy="0"/>
-          <a:chOff x="0" y="0"/>
-          <a:chExt cx="0" cy="0"/>
-        </a:xfrm>
-      </p:grpSpPr>
+      <p:grpSpPr/>
       <p:sp>
         <p:nvSpPr>
           <p:cNvPr id="2" name="Rectangle 1"/>
@@ -11081,7 +10813,7 @@
           </a:fontRef>
         </p:style>
         <p:txBody>
-          <a:bodyPr wrap="square" lIns="540000" tIns="180000" rtlCol="0" anchor="ctr"/>
+          <a:bodyPr rtlCol="0" anchor="ctr" wrap="square" lIns="540000" tIns="180000"/>
           <a:lstStyle/>
           <a:p>
             <a:pPr algn="l">
@@ -11288,7 +11020,23 @@
               </a:defRPr>
             </a:pPr>
             <a:r>
-              <a:t>仅在训练集上执行，测试集保持原分布</a:t>
+              <a:t>训练最终模型时仅在训练集上执行，测试集保持原分布</a:t>
+            </a:r>
+          </a:p>
+          <a:p>
+            <a:pPr>
+              <a:spcAft>
+                <a:spcPts val="800"/>
+              </a:spcAft>
+              <a:defRPr sz="1400">
+                <a:solidFill>
+                  <a:srgbClr val="000000"/>
+                </a:solidFill>
+                <a:latin typeface="Microsoft YaHei"/>
+              </a:defRPr>
+            </a:pPr>
+            <a:r>
+              <a:t>交叉验证时封装进Pipeline，仅在训练折内部执行</a:t>
             </a:r>
           </a:p>
           <a:p>
@@ -11474,7 +11222,6 @@
                 <a:latin typeface="Microsoft YaHei"/>
               </a:defRPr>
             </a:pPr>
-            <a:endParaRPr/>
           </a:p>
           <a:p>
             <a:pPr>
@@ -11530,7 +11277,7 @@
           </a:fontRef>
         </p:style>
         <p:txBody>
-          <a:bodyPr wrap="square" rtlCol="0" anchor="ctr"/>
+          <a:bodyPr rtlCol="0" anchor="ctr" wrap="square"/>
           <a:lstStyle/>
           <a:p>
             <a:pPr algn="ctr">
@@ -11542,7 +11289,7 @@
               </a:defRPr>
             </a:pPr>
             <a:r>
-              <a:t>SMOTE效果：流失客户Recall从~40%提升至71.4%（+30个百分点）</a:t>
+              <a:t>消融结果：SMOTE将Recall从0.4893提升至0.7086，同时F1提升至0.6295</a:t>
             </a:r>
           </a:p>
         </p:txBody>
@@ -11556,7 +11303,7 @@
 </file>
 
 <file path=ppt/slides/slide8.xml><?xml version="1.0" encoding="utf-8"?>
-<p:sld xmlns:a="http://schemas.openxmlformats.org/drawingml/2006/main" xmlns:r="http://schemas.openxmlformats.org/officeDocument/2006/relationships" xmlns:p="http://schemas.openxmlformats.org/presentationml/2006/main">
+<p:sld xmlns:a="http://schemas.openxmlformats.org/drawingml/2006/main" xmlns:p="http://schemas.openxmlformats.org/presentationml/2006/main" xmlns:r="http://schemas.openxmlformats.org/officeDocument/2006/relationships">
   <p:cSld>
     <p:bg>
       <p:bgPr>
@@ -11572,14 +11319,7 @@
         <p:cNvGrpSpPr/>
         <p:nvPr/>
       </p:nvGrpSpPr>
-      <p:grpSpPr>
-        <a:xfrm>
-          <a:off x="0" y="0"/>
-          <a:ext cx="0" cy="0"/>
-          <a:chOff x="0" y="0"/>
-          <a:chExt cx="0" cy="0"/>
-        </a:xfrm>
-      </p:grpSpPr>
+      <p:grpSpPr/>
       <p:sp>
         <p:nvSpPr>
           <p:cNvPr id="2" name="Rectangle 1"/>
@@ -11616,7 +11356,7 @@
           </a:fontRef>
         </p:style>
         <p:txBody>
-          <a:bodyPr wrap="square" lIns="540000" tIns="180000" rtlCol="0" anchor="ctr"/>
+          <a:bodyPr rtlCol="0" anchor="ctr" wrap="square" lIns="540000" tIns="180000"/>
           <a:lstStyle/>
           <a:p>
             <a:pPr algn="l">
@@ -11679,7 +11419,7 @@
         </p:nvGraphicFramePr>
         <p:xfrm>
           <a:off x="540000" y="1260000"/>
-          <a:ext cx="10800000" cy="2418480"/>
+          <a:ext cx="10800000" cy="2160000"/>
         </p:xfrm>
         <a:graphic>
           <a:graphicData uri="http://schemas.openxmlformats.org/drawingml/2006/table">
@@ -11688,34 +11428,10 @@
                 <a:tableStyleId>{5C22544A-7EE6-4342-B048-85BDC9FD1C3A}</a:tableStyleId>
               </a:tblPr>
               <a:tblGrid>
-                <a:gridCol w="2700000">
-                  <a:extLst>
-                    <a:ext uri="{9D8B030D-6E8A-4147-A177-3AD203B41FA5}">
-                      <a16:colId xmlns:a16="http://schemas.microsoft.com/office/drawing/2014/main" val="20000"/>
-                    </a:ext>
-                  </a:extLst>
-                </a:gridCol>
-                <a:gridCol w="2700000">
-                  <a:extLst>
-                    <a:ext uri="{9D8B030D-6E8A-4147-A177-3AD203B41FA5}">
-                      <a16:colId xmlns:a16="http://schemas.microsoft.com/office/drawing/2014/main" val="20001"/>
-                    </a:ext>
-                  </a:extLst>
-                </a:gridCol>
-                <a:gridCol w="2700000">
-                  <a:extLst>
-                    <a:ext uri="{9D8B030D-6E8A-4147-A177-3AD203B41FA5}">
-                      <a16:colId xmlns:a16="http://schemas.microsoft.com/office/drawing/2014/main" val="20002"/>
-                    </a:ext>
-                  </a:extLst>
-                </a:gridCol>
-                <a:gridCol w="2700000">
-                  <a:extLst>
-                    <a:ext uri="{9D8B030D-6E8A-4147-A177-3AD203B41FA5}">
-                      <a16:colId xmlns:a16="http://schemas.microsoft.com/office/drawing/2014/main" val="20003"/>
-                    </a:ext>
-                  </a:extLst>
-                </a:gridCol>
+                <a:gridCol w="2700000"/>
+                <a:gridCol w="2700000"/>
+                <a:gridCol w="2700000"/>
+                <a:gridCol w="2700000"/>
               </a:tblGrid>
               <a:tr h="432000">
                 <a:tc>
@@ -11814,11 +11530,6 @@
                     </a:solidFill>
                   </a:tcPr>
                 </a:tc>
-                <a:extLst>
-                  <a:ext uri="{0D108BD9-81ED-4DB2-BD59-A6C34878D82A}">
-                    <a16:rowId xmlns:a16="http://schemas.microsoft.com/office/drawing/2014/main" val="10000"/>
-                  </a:ext>
-                </a:extLst>
               </a:tr>
               <a:tr h="432000">
                 <a:tc>
@@ -11917,11 +11628,6 @@
                     </a:solidFill>
                   </a:tcPr>
                 </a:tc>
-                <a:extLst>
-                  <a:ext uri="{0D108BD9-81ED-4DB2-BD59-A6C34878D82A}">
-                    <a16:rowId xmlns:a16="http://schemas.microsoft.com/office/drawing/2014/main" val="10001"/>
-                  </a:ext>
-                </a:extLst>
               </a:tr>
               <a:tr h="432000">
                 <a:tc>
@@ -12004,11 +11710,6 @@
                   </a:txBody>
                   <a:tcPr/>
                 </a:tc>
-                <a:extLst>
-                  <a:ext uri="{0D108BD9-81ED-4DB2-BD59-A6C34878D82A}">
-                    <a16:rowId xmlns:a16="http://schemas.microsoft.com/office/drawing/2014/main" val="10002"/>
-                  </a:ext>
-                </a:extLst>
               </a:tr>
               <a:tr h="432000">
                 <a:tc>
@@ -12107,11 +11808,6 @@
                     </a:solidFill>
                   </a:tcPr>
                 </a:tc>
-                <a:extLst>
-                  <a:ext uri="{0D108BD9-81ED-4DB2-BD59-A6C34878D82A}">
-                    <a16:rowId xmlns:a16="http://schemas.microsoft.com/office/drawing/2014/main" val="10003"/>
-                  </a:ext>
-                </a:extLst>
               </a:tr>
               <a:tr h="432000">
                 <a:tc>
@@ -12194,11 +11890,6 @@
                   </a:txBody>
                   <a:tcPr/>
                 </a:tc>
-                <a:extLst>
-                  <a:ext uri="{0D108BD9-81ED-4DB2-BD59-A6C34878D82A}">
-                    <a16:rowId xmlns:a16="http://schemas.microsoft.com/office/drawing/2014/main" val="10004"/>
-                  </a:ext>
-                </a:extLst>
               </a:tr>
             </a:tbl>
           </a:graphicData>
@@ -12259,20 +11950,8 @@
                 <a:tableStyleId>{5C22544A-7EE6-4342-B048-85BDC9FD1C3A}</a:tableStyleId>
               </a:tblPr>
               <a:tblGrid>
-                <a:gridCol w="5400000">
-                  <a:extLst>
-                    <a:ext uri="{9D8B030D-6E8A-4147-A177-3AD203B41FA5}">
-                      <a16:colId xmlns:a16="http://schemas.microsoft.com/office/drawing/2014/main" val="20000"/>
-                    </a:ext>
-                  </a:extLst>
-                </a:gridCol>
-                <a:gridCol w="5400000">
-                  <a:extLst>
-                    <a:ext uri="{9D8B030D-6E8A-4147-A177-3AD203B41FA5}">
-                      <a16:colId xmlns:a16="http://schemas.microsoft.com/office/drawing/2014/main" val="20001"/>
-                    </a:ext>
-                  </a:extLst>
-                </a:gridCol>
+                <a:gridCol w="5400000"/>
+                <a:gridCol w="5400000"/>
               </a:tblGrid>
               <a:tr h="432000">
                 <a:tc>
@@ -12323,11 +12002,6 @@
                     </a:solidFill>
                   </a:tcPr>
                 </a:tc>
-                <a:extLst>
-                  <a:ext uri="{0D108BD9-81ED-4DB2-BD59-A6C34878D82A}">
-                    <a16:rowId xmlns:a16="http://schemas.microsoft.com/office/drawing/2014/main" val="10000"/>
-                  </a:ext>
-                </a:extLst>
               </a:tr>
               <a:tr h="432000">
                 <a:tc>
@@ -12378,11 +12052,6 @@
                     </a:solidFill>
                   </a:tcPr>
                 </a:tc>
-                <a:extLst>
-                  <a:ext uri="{0D108BD9-81ED-4DB2-BD59-A6C34878D82A}">
-                    <a16:rowId xmlns:a16="http://schemas.microsoft.com/office/drawing/2014/main" val="10001"/>
-                  </a:ext>
-                </a:extLst>
               </a:tr>
               <a:tr h="432000">
                 <a:tc>
@@ -12425,11 +12094,6 @@
                   </a:txBody>
                   <a:tcPr/>
                 </a:tc>
-                <a:extLst>
-                  <a:ext uri="{0D108BD9-81ED-4DB2-BD59-A6C34878D82A}">
-                    <a16:rowId xmlns:a16="http://schemas.microsoft.com/office/drawing/2014/main" val="10002"/>
-                  </a:ext>
-                </a:extLst>
               </a:tr>
               <a:tr h="432000">
                 <a:tc>
@@ -12470,7 +12134,7 @@
                         </a:defRPr>
                       </a:pPr>
                       <a:r>
-                        <a:t>80%训练（含SMOTE） / 20%测试（保持原始分布）</a:t>
+                        <a:t>80%训练 / 20%测试；CV中SMOTE仅在训练折内执行</a:t>
                       </a:r>
                     </a:p>
                   </a:txBody>
@@ -12480,11 +12144,6 @@
                     </a:solidFill>
                   </a:tcPr>
                 </a:tc>
-                <a:extLst>
-                  <a:ext uri="{0D108BD9-81ED-4DB2-BD59-A6C34878D82A}">
-                    <a16:rowId xmlns:a16="http://schemas.microsoft.com/office/drawing/2014/main" val="10003"/>
-                  </a:ext>
-                </a:extLst>
               </a:tr>
               <a:tr h="432000">
                 <a:tc>
@@ -12527,11 +12186,6 @@
                   </a:txBody>
                   <a:tcPr/>
                 </a:tc>
-                <a:extLst>
-                  <a:ext uri="{0D108BD9-81ED-4DB2-BD59-A6C34878D82A}">
-                    <a16:rowId xmlns:a16="http://schemas.microsoft.com/office/drawing/2014/main" val="10004"/>
-                  </a:ext>
-                </a:extLst>
               </a:tr>
             </a:tbl>
           </a:graphicData>
@@ -12546,7 +12200,7 @@
 </file>
 
 <file path=ppt/slides/slide9.xml><?xml version="1.0" encoding="utf-8"?>
-<p:sld xmlns:a="http://schemas.openxmlformats.org/drawingml/2006/main" xmlns:r="http://schemas.openxmlformats.org/officeDocument/2006/relationships" xmlns:p="http://schemas.openxmlformats.org/presentationml/2006/main">
+<p:sld xmlns:a="http://schemas.openxmlformats.org/drawingml/2006/main" xmlns:p="http://schemas.openxmlformats.org/presentationml/2006/main" xmlns:r="http://schemas.openxmlformats.org/officeDocument/2006/relationships">
   <p:cSld>
     <p:bg>
       <p:bgPr>
@@ -12562,14 +12216,7 @@
         <p:cNvGrpSpPr/>
         <p:nvPr/>
       </p:nvGrpSpPr>
-      <p:grpSpPr>
-        <a:xfrm>
-          <a:off x="0" y="0"/>
-          <a:ext cx="0" cy="0"/>
-          <a:chOff x="0" y="0"/>
-          <a:chExt cx="0" cy="0"/>
-        </a:xfrm>
-      </p:grpSpPr>
+      <p:grpSpPr/>
       <p:sp>
         <p:nvSpPr>
           <p:cNvPr id="2" name="Rectangle 1"/>
@@ -12606,7 +12253,7 @@
           </a:fontRef>
         </p:style>
         <p:txBody>
-          <a:bodyPr wrap="square" lIns="540000" tIns="180000" rtlCol="0" anchor="ctr"/>
+          <a:bodyPr rtlCol="0" anchor="ctr" wrap="square" lIns="540000" tIns="180000"/>
           <a:lstStyle/>
           <a:p>
             <a:pPr algn="l">
@@ -12618,7 +12265,7 @@
               </a:defRPr>
             </a:pPr>
             <a:r>
-              <a:t>7. 实验结果 — 5折交叉验证（SMOTE训练集）</a:t>
+              <a:t>7. 实验结果 — 5折交叉验证（折内SMOTE）</a:t>
             </a:r>
           </a:p>
         </p:txBody>
@@ -12669,7 +12316,7 @@
         </p:nvGraphicFramePr>
         <p:xfrm>
           <a:off x="360000" y="1260000"/>
-          <a:ext cx="10800000" cy="2246160"/>
+          <a:ext cx="10800000" cy="2160000"/>
         </p:xfrm>
         <a:graphic>
           <a:graphicData uri="http://schemas.openxmlformats.org/drawingml/2006/table">
@@ -12678,48 +12325,12 @@
                 <a:tableStyleId>{5C22544A-7EE6-4342-B048-85BDC9FD1C3A}</a:tableStyleId>
               </a:tblPr>
               <a:tblGrid>
-                <a:gridCol w="1800000">
-                  <a:extLst>
-                    <a:ext uri="{9D8B030D-6E8A-4147-A177-3AD203B41FA5}">
-                      <a16:colId xmlns:a16="http://schemas.microsoft.com/office/drawing/2014/main" val="20000"/>
-                    </a:ext>
-                  </a:extLst>
-                </a:gridCol>
-                <a:gridCol w="1800000">
-                  <a:extLst>
-                    <a:ext uri="{9D8B030D-6E8A-4147-A177-3AD203B41FA5}">
-                      <a16:colId xmlns:a16="http://schemas.microsoft.com/office/drawing/2014/main" val="20001"/>
-                    </a:ext>
-                  </a:extLst>
-                </a:gridCol>
-                <a:gridCol w="1800000">
-                  <a:extLst>
-                    <a:ext uri="{9D8B030D-6E8A-4147-A177-3AD203B41FA5}">
-                      <a16:colId xmlns:a16="http://schemas.microsoft.com/office/drawing/2014/main" val="20002"/>
-                    </a:ext>
-                  </a:extLst>
-                </a:gridCol>
-                <a:gridCol w="1800000">
-                  <a:extLst>
-                    <a:ext uri="{9D8B030D-6E8A-4147-A177-3AD203B41FA5}">
-                      <a16:colId xmlns:a16="http://schemas.microsoft.com/office/drawing/2014/main" val="20003"/>
-                    </a:ext>
-                  </a:extLst>
-                </a:gridCol>
-                <a:gridCol w="1800000">
-                  <a:extLst>
-                    <a:ext uri="{9D8B030D-6E8A-4147-A177-3AD203B41FA5}">
-                      <a16:colId xmlns:a16="http://schemas.microsoft.com/office/drawing/2014/main" val="20004"/>
-                    </a:ext>
-                  </a:extLst>
-                </a:gridCol>
-                <a:gridCol w="1800000">
-                  <a:extLst>
-                    <a:ext uri="{9D8B030D-6E8A-4147-A177-3AD203B41FA5}">
-                      <a16:colId xmlns:a16="http://schemas.microsoft.com/office/drawing/2014/main" val="20005"/>
-                    </a:ext>
-                  </a:extLst>
-                </a:gridCol>
+                <a:gridCol w="1800000"/>
+                <a:gridCol w="1800000"/>
+                <a:gridCol w="1800000"/>
+                <a:gridCol w="1800000"/>
+                <a:gridCol w="1800000"/>
+                <a:gridCol w="1800000"/>
               </a:tblGrid>
               <a:tr h="432000">
                 <a:tc>
@@ -12866,11 +12477,6 @@
                     </a:solidFill>
                   </a:tcPr>
                 </a:tc>
-                <a:extLst>
-                  <a:ext uri="{0D108BD9-81ED-4DB2-BD59-A6C34878D82A}">
-                    <a16:rowId xmlns:a16="http://schemas.microsoft.com/office/drawing/2014/main" val="10000"/>
-                  </a:ext>
-                </a:extLst>
               </a:tr>
               <a:tr h="432000">
                 <a:tc>
@@ -12911,7 +12517,7 @@
                         </a:defRPr>
                       </a:pPr>
                       <a:r>
-                        <a:t>0.8195 ± 0.0076</a:t>
+                        <a:t>0.7650 ± 0.0154</a:t>
                       </a:r>
                     </a:p>
                   </a:txBody>
@@ -12935,7 +12541,7 @@
                         </a:defRPr>
                       </a:pPr>
                       <a:r>
-                        <a:t>0.7977 ± 0.0076</a:t>
+                        <a:t>0.5443 ± 0.0232</a:t>
                       </a:r>
                     </a:p>
                   </a:txBody>
@@ -12959,7 +12565,7 @@
                         </a:defRPr>
                       </a:pPr>
                       <a:r>
-                        <a:t>0.8562 ± 0.0136</a:t>
+                        <a:t>0.7050 ± 0.0347</a:t>
                       </a:r>
                     </a:p>
                   </a:txBody>
@@ -12983,7 +12589,7 @@
                         </a:defRPr>
                       </a:pPr>
                       <a:r>
-                        <a:t>0.8259 ± 0.0079</a:t>
+                        <a:t>0.6141 ± 0.0257</a:t>
                       </a:r>
                     </a:p>
                   </a:txBody>
@@ -13007,7 +12613,7 @@
                         </a:defRPr>
                       </a:pPr>
                       <a:r>
-                        <a:t>0.9089 ± 0.0039</a:t>
+                        <a:t>0.8349 ± 0.0128</a:t>
                       </a:r>
                     </a:p>
                   </a:txBody>
@@ -13017,11 +12623,6 @@
                     </a:solidFill>
                   </a:tcPr>
                 </a:tc>
-                <a:extLst>
-                  <a:ext uri="{0D108BD9-81ED-4DB2-BD59-A6C34878D82A}">
-                    <a16:rowId xmlns:a16="http://schemas.microsoft.com/office/drawing/2014/main" val="10001"/>
-                  </a:ext>
-                </a:extLst>
               </a:tr>
               <a:tr h="432000">
                 <a:tc>
@@ -13038,7 +12639,7 @@
                         </a:defRPr>
                       </a:pPr>
                       <a:r>
-                        <a:t>Random Forest</a:t>
+                        <a:t>Random Forest 🏆</a:t>
                       </a:r>
                     </a:p>
                   </a:txBody>
@@ -13058,7 +12659,7 @@
                         </a:defRPr>
                       </a:pPr>
                       <a:r>
-                        <a:t>0.8384 ± 0.0099</a:t>
+                        <a:t>0.7772 ± 0.0112</a:t>
                       </a:r>
                     </a:p>
                   </a:txBody>
@@ -13078,7 +12679,7 @@
                         </a:defRPr>
                       </a:pPr>
                       <a:r>
-                        <a:t>0.8193 ± 0.0093</a:t>
+                        <a:t>0.5657 ± 0.0173</a:t>
                       </a:r>
                     </a:p>
                   </a:txBody>
@@ -13098,7 +12699,7 @@
                         </a:defRPr>
                       </a:pPr>
                       <a:r>
-                        <a:t>0.8683 ± 0.0150</a:t>
+                        <a:t>0.6903 ± 0.0419</a:t>
                       </a:r>
                     </a:p>
                   </a:txBody>
@@ -13118,7 +12719,7 @@
                         </a:defRPr>
                       </a:pPr>
                       <a:r>
-                        <a:t>0.8430 ± 0.0101</a:t>
+                        <a:t>0.6214 ± 0.0243</a:t>
                       </a:r>
                     </a:p>
                   </a:txBody>
@@ -13138,17 +12739,12 @@
                         </a:defRPr>
                       </a:pPr>
                       <a:r>
-                        <a:t>0.9175 ± 0.0035</a:t>
+                        <a:t>0.8393 ± 0.0095</a:t>
                       </a:r>
                     </a:p>
                   </a:txBody>
                   <a:tcPr/>
                 </a:tc>
-                <a:extLst>
-                  <a:ext uri="{0D108BD9-81ED-4DB2-BD59-A6C34878D82A}">
-                    <a16:rowId xmlns:a16="http://schemas.microsoft.com/office/drawing/2014/main" val="10002"/>
-                  </a:ext>
-                </a:extLst>
               </a:tr>
               <a:tr h="432000">
                 <a:tc>
@@ -13165,7 +12761,7 @@
                         </a:defRPr>
                       </a:pPr>
                       <a:r>
-                        <a:t>XGBoost 🏆</a:t>
+                        <a:t>XGBoost</a:t>
                       </a:r>
                     </a:p>
                   </a:txBody>
@@ -13189,7 +12785,7 @@
                         </a:defRPr>
                       </a:pPr>
                       <a:r>
-                        <a:t>0.8530 ± 0.0089</a:t>
+                        <a:t>0.7790 ± 0.0046</a:t>
                       </a:r>
                     </a:p>
                   </a:txBody>
@@ -13213,7 +12809,7 @@
                         </a:defRPr>
                       </a:pPr>
                       <a:r>
-                        <a:t>0.8531 ± 0.0077</a:t>
+                        <a:t>0.5866 ± 0.0118</a:t>
                       </a:r>
                     </a:p>
                   </a:txBody>
@@ -13237,7 +12833,7 @@
                         </a:defRPr>
                       </a:pPr>
                       <a:r>
-                        <a:t>0.8529 ± 0.0140</a:t>
+                        <a:t>0.5686 ± 0.0186</a:t>
                       </a:r>
                     </a:p>
                   </a:txBody>
@@ -13261,7 +12857,7 @@
                         </a:defRPr>
                       </a:pPr>
                       <a:r>
-                        <a:t>0.8529 ± 0.0094</a:t>
+                        <a:t>0.5771 ± 0.0089</a:t>
                       </a:r>
                     </a:p>
                   </a:txBody>
@@ -13285,7 +12881,7 @@
                         </a:defRPr>
                       </a:pPr>
                       <a:r>
-                        <a:t>0.9337 ± 0.0040</a:t>
+                        <a:t>0.8210 ± 0.0060</a:t>
                       </a:r>
                     </a:p>
                   </a:txBody>
@@ -13295,11 +12891,6 @@
                     </a:solidFill>
                   </a:tcPr>
                 </a:tc>
-                <a:extLst>
-                  <a:ext uri="{0D108BD9-81ED-4DB2-BD59-A6C34878D82A}">
-                    <a16:rowId xmlns:a16="http://schemas.microsoft.com/office/drawing/2014/main" val="10003"/>
-                  </a:ext>
-                </a:extLst>
               </a:tr>
               <a:tr h="432000">
                 <a:tc>
@@ -13336,7 +12927,7 @@
                         </a:defRPr>
                       </a:pPr>
                       <a:r>
-                        <a:t>0.8524 ± 0.0071</a:t>
+                        <a:t>0.7796 ± 0.0093</a:t>
                       </a:r>
                     </a:p>
                   </a:txBody>
@@ -13356,7 +12947,7 @@
                         </a:defRPr>
                       </a:pPr>
                       <a:r>
-                        <a:t>0.8499 ± 0.0068</a:t>
+                        <a:t>0.5852 ± 0.0159</a:t>
                       </a:r>
                     </a:p>
                   </a:txBody>
@@ -13376,7 +12967,7 @@
                         </a:defRPr>
                       </a:pPr>
                       <a:r>
-                        <a:t>0.8560 ± 0.0097</a:t>
+                        <a:t>0.5793 ± 0.0364</a:t>
                       </a:r>
                     </a:p>
                   </a:txBody>
@@ -13396,7 +12987,7 @@
                         </a:defRPr>
                       </a:pPr>
                       <a:r>
-                        <a:t>0.8529 ± 0.0073</a:t>
+                        <a:t>0.5819 ± 0.0247</a:t>
                       </a:r>
                     </a:p>
                   </a:txBody>
@@ -13416,17 +13007,12 @@
                         </a:defRPr>
                       </a:pPr>
                       <a:r>
-                        <a:t>0.9325 ± 0.0041</a:t>
+                        <a:t>0.8229 ± 0.0054</a:t>
                       </a:r>
                     </a:p>
                   </a:txBody>
                   <a:tcPr/>
                 </a:tc>
-                <a:extLst>
-                  <a:ext uri="{0D108BD9-81ED-4DB2-BD59-A6C34878D82A}">
-                    <a16:rowId xmlns:a16="http://schemas.microsoft.com/office/drawing/2014/main" val="10004"/>
-                  </a:ext>
-                </a:extLst>
               </a:tr>
             </a:tbl>
           </a:graphicData>
@@ -13463,7 +13049,7 @@
               </a:defRPr>
             </a:pPr>
             <a:r>
-              <a:t>📌 XGBoost在平衡训练集上最优（ROC-AUC=0.9337），集成学习优势明显</a:t>
+              <a:t>📌 折内SMOTE后，随机森林CV ROC-AUC最高（0.8393），结果更接近真实泛化表现</a:t>
             </a:r>
           </a:p>
         </p:txBody>
@@ -13499,7 +13085,7 @@
               </a:defRPr>
             </a:pPr>
             <a:r>
-              <a:t>但！真实场景的测试集仍是不平衡的，让我们看测试集结果 →</a:t>
+              <a:t>测试集始终保持原始不平衡分布，用于检验真实业务泛化能力 →</a:t>
             </a:r>
           </a:p>
         </p:txBody>

--- a/答辩PPT.pptx
+++ b/答辩PPT.pptx
@@ -3283,24 +3283,21 @@
           </a:bodyPr>
           <a:lstStyle/>
           <a:p>
-            <a:pPr algn="l">
-              <a:defRPr sz="1600" b="0">
-                <a:solidFill>
-                  <a:srgbClr val="566573"/>
-                </a:solidFill>
-                <a:latin typeface="Microsoft YaHei"/>
-              </a:defRPr>
-            </a:pPr>
-            <a:r>
-              <a:t>小组成员：XXX  |  XXX  |  XXX</a:t>
-            </a:r>
-            <a:br/>
-            <a:r>
-              <a:t>专业班级：XXX</a:t>
-            </a:r>
-            <a:br/>
-            <a:r>
-              <a:t>指导老师：XXX</a:t>
+            <a:r>
+              <a:rPr sz="1800"/>
+              <a:t>小组成员：张嘉鹏（202425310225） | 陈国俊（202425310201） | 郑圣豪（202425310226）</a:t>
+            </a:r>
+          </a:p>
+          <a:p>
+            <a:r>
+              <a:rPr sz="1800"/>
+              <a:t>专业班级：24计算机科学与技术2班</a:t>
+            </a:r>
+          </a:p>
+          <a:p>
+            <a:r>
+              <a:rPr sz="1800"/>
+              <a:t>指导老师：蓝连涛</a:t>
             </a:r>
           </a:p>
         </p:txBody>
